--- a/slide/Slide_TOAN10_Bai1_T1-4.pptx
+++ b/slide/Slide_TOAN10_Bai1_T1-4.pptx
@@ -3431,7 +3431,7 @@
         <p:spPr>
           <a:xfrm>
             <a:off x="731520" y="274320"/>
-            <a:ext cx="10972800" cy="868680"/>
+            <a:ext cx="9610344" cy="868680"/>
           </a:xfrm>
           <a:prstGeom prst="rect">
             <a:avLst/>
@@ -3451,7 +3451,7 @@
                 </a:solidFill>
                 <a:latin typeface="Arial"/>
               </a:rPr>
-              <a:t>ĐỊNH LÍ – ĐIỀU KIỆN CẦN, ĐỦ</a:t>
+              <a:t>LUYỆN TẬP: MỆNH ĐỀ PHỦ ĐỊNH</a:t>
             </a:r>
           </a:p>
         </p:txBody>
@@ -3530,113 +3530,279 @@
                 </a:solidFill>
                 <a:latin typeface="Calibri"/>
               </a:rPr>
-              <a:t>Toán 10 · Bài 1. Mệnh đề          12</a:t>
-            </a:r>
-          </a:p>
-        </p:txBody>
-      </p:sp>
-      <p:sp>
-        <p:nvSpPr>
-          <p:cNvPr id="6" name="TextBox 5"/>
-          <p:cNvSpPr txBox="1"/>
-          <p:nvPr/>
-        </p:nvSpPr>
-        <p:spPr>
-          <a:xfrm>
-            <a:off x="731520" y="1508760"/>
-            <a:ext cx="6400800" cy="2267712"/>
-          </a:xfrm>
-          <a:prstGeom prst="rect">
-            <a:avLst/>
-          </a:prstGeom>
-          <a:noFill/>
-        </p:spPr>
-        <p:txBody>
-          <a:bodyPr wrap="square" anchor="t">
-            <a:spAutoFit/>
-          </a:bodyPr>
-          <a:lstStyle/>
-          <a:p>
-            <a:pPr algn="l">
-              <a:spcAft>
-                <a:spcPts val="1000"/>
-              </a:spcAft>
-            </a:pPr>
-            <a:r>
-              <a:rPr sz="2400" b="1">
-                <a:solidFill>
-                  <a:srgbClr val="1E40AF"/>
-                </a:solidFill>
-                <a:latin typeface="Calibri"/>
-              </a:rPr>
-              <a:t>Định lí thường có dạng P ⇒ Q</a:t>
-            </a:r>
-          </a:p>
-          <a:p>
-            <a:pPr algn="l" marL="365760" indent="-365760">
-              <a:spcAft>
-                <a:spcPts val="1000"/>
-              </a:spcAft>
-              <a:buClr>
-                <a:srgbClr val="1E40AF"/>
-              </a:buClr>
-              <a:buFont typeface="Arial"/>
-              <a:buChar char="•"/>
-            </a:pPr>
-            <a:r>
-              <a:rPr sz="2400">
-                <a:solidFill>
-                  <a:srgbClr val="1E293B"/>
-                </a:solidFill>
-                <a:latin typeface="Calibri"/>
-              </a:rPr>
-              <a:t>P: giả thiết;  Q: kết luận</a:t>
-            </a:r>
-          </a:p>
-          <a:p>
-            <a:pPr algn="l" marL="365760" indent="-365760">
-              <a:spcAft>
-                <a:spcPts val="1000"/>
-              </a:spcAft>
-              <a:buClr>
-                <a:srgbClr val="1E40AF"/>
-              </a:buClr>
-              <a:buFont typeface="Arial"/>
-              <a:buChar char="•"/>
-            </a:pPr>
-            <a:r>
-              <a:rPr sz="2400">
-                <a:solidFill>
-                  <a:srgbClr val="1E293B"/>
-                </a:solidFill>
-                <a:latin typeface="Calibri"/>
-              </a:rPr>
-              <a:t>Ví dụ: tổng hai góc đối 180°</a:t>
-            </a:r>
-          </a:p>
-          <a:p>
-            <a:pPr algn="l" marL="365760" indent="-365760">
-              <a:spcAft>
-                <a:spcPts val="1000"/>
-              </a:spcAft>
-              <a:buClr>
-                <a:srgbClr val="1E40AF"/>
-              </a:buClr>
-              <a:buFont typeface="Arial"/>
-              <a:buChar char="•"/>
-            </a:pPr>
-            <a:r>
-              <a:rPr sz="2400">
-                <a:solidFill>
-                  <a:srgbClr val="1E293B"/>
-                </a:solidFill>
-                <a:latin typeface="Calibri"/>
-              </a:rPr>
-              <a:t>⇒ ABCD nội tiếp đường tròn</a:t>
-            </a:r>
-          </a:p>
-        </p:txBody>
-      </p:sp>
+              <a:t>Toán 10 · Bài 1. Mệnh đề          10</a:t>
+            </a:r>
+          </a:p>
+        </p:txBody>
+      </p:sp>
+      <mc:AlternateContent xmlns:mc="http://schemas.openxmlformats.org/markup-compatibility/2006">
+        <mc:Choice xmlns:a14="http://schemas.microsoft.com/office/drawing/2010/main" Requires="a14">
+          <p:sp>
+            <p:nvSpPr>
+              <p:cNvPr id="6" name="TextBox 5"/>
+              <p:cNvSpPr txBox="1"/>
+              <p:nvPr/>
+            </p:nvSpPr>
+            <p:spPr>
+              <a:xfrm>
+                <a:off x="731520" y="1508760"/>
+                <a:ext cx="10789920" cy="2267712"/>
+              </a:xfrm>
+              <a:prstGeom prst="rect">
+                <a:avLst/>
+              </a:prstGeom>
+              <a:noFill/>
+            </p:spPr>
+            <p:txBody>
+              <a:bodyPr wrap="square" anchor="t">
+                <a:spAutoFit/>
+              </a:bodyPr>
+              <a:lstStyle/>
+              <a:p>
+                <a:pPr algn="l" marL="365760" indent="-365760">
+                  <a:spcAft>
+                    <a:spcPts val="1000"/>
+                  </a:spcAft>
+                  <a:buClr>
+                    <a:srgbClr val="1E40AF"/>
+                  </a:buClr>
+                  <a:buFont typeface="Arial"/>
+                  <a:buChar char="•"/>
+                </a:pPr>
+                <a:r>
+                  <a:rPr sz="2400">
+                    <a:solidFill>
+                      <a:srgbClr val="1E293B"/>
+                    </a:solidFill>
+                    <a:latin typeface="Calibri"/>
+                  </a:rPr>
+                  <a:t>P: “2022 chia hết cho 5”</a:t>
+                </a:r>
+              </a:p>
+              <a:p>
+                <a:pPr algn="l" marL="365760" indent="-365760">
+                  <a:spcAft>
+                    <a:spcPts val="1000"/>
+                  </a:spcAft>
+                  <a:buClr>
+                    <a:srgbClr val="1E40AF"/>
+                  </a:buClr>
+                  <a:buFont typeface="Arial"/>
+                  <a:buChar char="•"/>
+                </a:pPr>
+                <a14:m xmlns:m="http://schemas.openxmlformats.org/officeDocument/2006/math">
+                  <m:oMath>
+                    <m:bar>
+                      <m:barPr>
+                        <m:pos m:val="top"/>
+                      </m:barPr>
+                      <m:e>
+                        <m:r>
+                          <a:rPr lang="vi-VN" sz="2400" b="0" i="1">
+                            <a:solidFill>
+                              <a:srgbClr val="1E293B"/>
+                            </a:solidFill>
+                            <a:latin typeface="Cambria Math" panose="02040503050406030204" pitchFamily="18" charset="0"/>
+                          </a:rPr>
+                          <m:t>P</m:t>
+                        </m:r>
+                      </m:e>
+                    </m:bar>
+                  </m:oMath>
+                </a14:m>
+                <a:r>
+                  <a:rPr sz="2400">
+                    <a:solidFill>
+                      <a:srgbClr val="1E293B"/>
+                    </a:solidFill>
+                    <a:latin typeface="Calibri"/>
+                  </a:rPr>
+                  <a:t>: “2022 không chia hết cho 5”</a:t>
+                </a:r>
+              </a:p>
+              <a:p>
+                <a:pPr algn="l" marL="365760" indent="-365760">
+                  <a:spcAft>
+                    <a:spcPts val="1000"/>
+                  </a:spcAft>
+                  <a:buClr>
+                    <a:srgbClr val="1E40AF"/>
+                  </a:buClr>
+                  <a:buFont typeface="Arial"/>
+                  <a:buChar char="•"/>
+                </a:pPr>
+                <a:r>
+                  <a:rPr sz="2400">
+                    <a:solidFill>
+                      <a:srgbClr val="1E293B"/>
+                    </a:solidFill>
+                    <a:latin typeface="Calibri"/>
+                  </a:rPr>
+                  <a:t>Q: “2x + 1 &gt; 0 có nghiệm”</a:t>
+                </a:r>
+              </a:p>
+              <a:p>
+                <a:pPr algn="l" marL="365760" indent="-365760">
+                  <a:spcAft>
+                    <a:spcPts val="1000"/>
+                  </a:spcAft>
+                  <a:buClr>
+                    <a:srgbClr val="1E40AF"/>
+                  </a:buClr>
+                  <a:buFont typeface="Arial"/>
+                  <a:buChar char="•"/>
+                </a:pPr>
+                <a14:m xmlns:m="http://schemas.openxmlformats.org/officeDocument/2006/math">
+                  <m:oMath>
+                    <m:bar>
+                      <m:barPr>
+                        <m:pos m:val="top"/>
+                      </m:barPr>
+                      <m:e>
+                        <m:r>
+                          <a:rPr lang="vi-VN" sz="2400" b="0" i="1">
+                            <a:solidFill>
+                              <a:srgbClr val="1E293B"/>
+                            </a:solidFill>
+                            <a:latin typeface="Cambria Math" panose="02040503050406030204" pitchFamily="18" charset="0"/>
+                          </a:rPr>
+                          <m:t>Q</m:t>
+                        </m:r>
+                      </m:e>
+                    </m:bar>
+                  </m:oMath>
+                </a14:m>
+                <a:r>
+                  <a:rPr sz="2400">
+                    <a:solidFill>
+                      <a:srgbClr val="1E293B"/>
+                    </a:solidFill>
+                    <a:latin typeface="Calibri"/>
+                  </a:rPr>
+                  <a:t>: “2x + 1 &gt; 0 vô nghiệm”</a:t>
+                </a:r>
+              </a:p>
+            </p:txBody>
+          </p:sp>
+        </mc:Choice>
+        <mc:Fallback>
+          <p:sp>
+            <p:nvSpPr>
+              <p:cNvPr id="6" name="TextBox 5"/>
+              <p:cNvSpPr txBox="1"/>
+              <p:nvPr/>
+            </p:nvSpPr>
+            <p:spPr>
+              <a:xfrm>
+                <a:off x="731520" y="1508760"/>
+                <a:ext cx="10789920" cy="2267712"/>
+              </a:xfrm>
+              <a:prstGeom prst="rect">
+                <a:avLst/>
+              </a:prstGeom>
+              <a:noFill/>
+            </p:spPr>
+            <p:txBody>
+              <a:bodyPr wrap="square" anchor="t">
+                <a:spAutoFit/>
+              </a:bodyPr>
+              <a:lstStyle/>
+              <a:p>
+                <a:pPr algn="l" marL="365760" indent="-365760">
+                  <a:spcAft>
+                    <a:spcPts val="1000"/>
+                  </a:spcAft>
+                  <a:buClr>
+                    <a:srgbClr val="1E40AF"/>
+                  </a:buClr>
+                  <a:buFont typeface="Arial"/>
+                  <a:buChar char="•"/>
+                </a:pPr>
+                <a:r>
+                  <a:rPr sz="2400">
+                    <a:solidFill>
+                      <a:srgbClr val="1E293B"/>
+                    </a:solidFill>
+                    <a:latin typeface="Calibri"/>
+                  </a:rPr>
+                  <a:t>P: “2022 chia hết cho 5”</a:t>
+                </a:r>
+              </a:p>
+              <a:p>
+                <a:pPr algn="l" marL="365760" indent="-365760">
+                  <a:spcAft>
+                    <a:spcPts val="1000"/>
+                  </a:spcAft>
+                  <a:buClr>
+                    <a:srgbClr val="1E40AF"/>
+                  </a:buClr>
+                  <a:buFont typeface="Arial"/>
+                  <a:buChar char="•"/>
+                </a:pPr>
+                <a:r>
+                  <a:rPr lang="vi-VN"/>
+                  <a:t>P̅</a:t>
+                </a:r>
+                <a:r>
+                  <a:rPr sz="2400">
+                    <a:solidFill>
+                      <a:srgbClr val="1E293B"/>
+                    </a:solidFill>
+                    <a:latin typeface="Calibri"/>
+                  </a:rPr>
+                  <a:t>: “2022 không chia hết cho 5”</a:t>
+                </a:r>
+              </a:p>
+              <a:p>
+                <a:pPr algn="l" marL="365760" indent="-365760">
+                  <a:spcAft>
+                    <a:spcPts val="1000"/>
+                  </a:spcAft>
+                  <a:buClr>
+                    <a:srgbClr val="1E40AF"/>
+                  </a:buClr>
+                  <a:buFont typeface="Arial"/>
+                  <a:buChar char="•"/>
+                </a:pPr>
+                <a:r>
+                  <a:rPr sz="2400">
+                    <a:solidFill>
+                      <a:srgbClr val="1E293B"/>
+                    </a:solidFill>
+                    <a:latin typeface="Calibri"/>
+                  </a:rPr>
+                  <a:t>Q: “2x + 1 &gt; 0 có nghiệm”</a:t>
+                </a:r>
+              </a:p>
+              <a:p>
+                <a:pPr algn="l" marL="365760" indent="-365760">
+                  <a:spcAft>
+                    <a:spcPts val="1000"/>
+                  </a:spcAft>
+                  <a:buClr>
+                    <a:srgbClr val="1E40AF"/>
+                  </a:buClr>
+                  <a:buFont typeface="Arial"/>
+                  <a:buChar char="•"/>
+                </a:pPr>
+                <a:r>
+                  <a:rPr lang="vi-VN"/>
+                  <a:t>Q̅</a:t>
+                </a:r>
+                <a:r>
+                  <a:rPr sz="2400">
+                    <a:solidFill>
+                      <a:srgbClr val="1E293B"/>
+                    </a:solidFill>
+                    <a:latin typeface="Calibri"/>
+                  </a:rPr>
+                  <a:t>: “2x + 1 &gt; 0 vô nghiệm”</a:t>
+                </a:r>
+              </a:p>
+            </p:txBody>
+          </p:sp>
+        </mc:Fallback>
+      </mc:AlternateContent>
       <p:sp>
         <p:nvSpPr>
           <p:cNvPr id="7" name="Rounded Rectangle 6"/>
@@ -3646,7 +3812,7 @@
         <p:spPr>
           <a:xfrm>
             <a:off x="731520" y="3913632"/>
-            <a:ext cx="6400800" cy="1143000"/>
+            <a:ext cx="8686800" cy="685800"/>
           </a:xfrm>
           <a:prstGeom prst="roundRect">
             <a:avLst>
@@ -3685,85 +3851,209 @@
           </a:p>
         </p:txBody>
       </p:sp>
-      <p:sp>
-        <p:nvSpPr>
-          <p:cNvPr id="8" name="TextBox 7"/>
-          <p:cNvSpPr txBox="1"/>
-          <p:nvPr/>
-        </p:nvSpPr>
-        <p:spPr>
-          <a:xfrm>
-            <a:off x="914400" y="3913632"/>
-            <a:ext cx="6035040" cy="1143000"/>
-          </a:xfrm>
-          <a:prstGeom prst="rect">
-            <a:avLst/>
-          </a:prstGeom>
-          <a:noFill/>
-        </p:spPr>
-        <p:txBody>
-          <a:bodyPr wrap="square" anchor="ctr">
-            <a:spAutoFit/>
-          </a:bodyPr>
-          <a:lstStyle/>
-          <a:p>
-            <a:pPr algn="l">
-              <a:spcAft>
-                <a:spcPts val="400"/>
-              </a:spcAft>
-            </a:pPr>
-            <a:r>
-              <a:rPr sz="2400" b="1">
-                <a:solidFill>
-                  <a:srgbClr val="991B1B"/>
-                </a:solidFill>
-                <a:latin typeface="Calibri"/>
-              </a:rPr>
-              <a:t>P là điều kiện đủ để có Q</a:t>
-            </a:r>
-          </a:p>
-          <a:p>
-            <a:pPr algn="l">
-              <a:spcAft>
-                <a:spcPts val="400"/>
-              </a:spcAft>
-            </a:pPr>
-            <a:r>
-              <a:rPr sz="2400" b="1">
-                <a:solidFill>
-                  <a:srgbClr val="991B1B"/>
-                </a:solidFill>
-                <a:latin typeface="Calibri"/>
-              </a:rPr>
-              <a:t>Q là điều kiện cần để có P</a:t>
-            </a:r>
-          </a:p>
-        </p:txBody>
-      </p:sp>
-      <p:pic>
-        <p:nvPicPr>
-          <p:cNvPr id="9" name="Picture 8" descr="rId13.png"/>
-          <p:cNvPicPr>
-            <a:picLocks noChangeAspect="1"/>
-          </p:cNvPicPr>
-          <p:nvPr/>
-        </p:nvPicPr>
-        <p:blipFill>
-          <a:blip r:embed="rId2"/>
-          <a:stretch>
-            <a:fillRect/>
-          </a:stretch>
-        </p:blipFill>
-        <p:spPr>
-          <a:xfrm>
-            <a:off x="7406640" y="1866900"/>
-            <a:ext cx="4389120" cy="3901440"/>
-          </a:xfrm>
-          <a:prstGeom prst="rect">
-            <a:avLst/>
-          </a:prstGeom>
-        </p:spPr>
-      </p:pic>
+      <mc:AlternateContent xmlns:mc="http://schemas.openxmlformats.org/markup-compatibility/2006">
+        <mc:Choice xmlns:a14="http://schemas.microsoft.com/office/drawing/2010/main" Requires="a14">
+          <p:sp>
+            <p:nvSpPr>
+              <p:cNvPr id="8" name="TextBox 7"/>
+              <p:cNvSpPr txBox="1"/>
+              <p:nvPr/>
+            </p:nvSpPr>
+            <p:spPr>
+              <a:xfrm>
+                <a:off x="914400" y="3913632"/>
+                <a:ext cx="8321040" cy="685800"/>
+              </a:xfrm>
+              <a:prstGeom prst="rect">
+                <a:avLst/>
+              </a:prstGeom>
+              <a:noFill/>
+            </p:spPr>
+            <p:txBody>
+              <a:bodyPr wrap="square" anchor="ctr">
+                <a:spAutoFit/>
+              </a:bodyPr>
+              <a:lstStyle/>
+              <a:p>
+                <a:pPr algn="l">
+                  <a:spcAft>
+                    <a:spcPts val="400"/>
+                  </a:spcAft>
+                </a:pPr>
+                <a14:m xmlns:m="http://schemas.openxmlformats.org/officeDocument/2006/math">
+                  <m:oMath>
+                    <m:bar>
+                      <m:barPr>
+                        <m:pos m:val="top"/>
+                      </m:barPr>
+                      <m:e>
+                        <m:r>
+                          <a:rPr lang="vi-VN" sz="2400" b="1" i="1">
+                            <a:solidFill>
+                              <a:srgbClr val="991B1B"/>
+                            </a:solidFill>
+                            <a:latin typeface="Cambria Math" panose="02040503050406030204" pitchFamily="18" charset="0"/>
+                          </a:rPr>
+                          <m:t>P</m:t>
+                        </m:r>
+                      </m:e>
+                    </m:bar>
+                  </m:oMath>
+                </a14:m>
+                <a:r>
+                  <a:rPr sz="2400" b="1">
+                    <a:solidFill>
+                      <a:srgbClr val="991B1B"/>
+                    </a:solidFill>
+                    <a:latin typeface="Calibri"/>
+                  </a:rPr>
+                  <a:t> đúng; </a:t>
+                </a:r>
+                <a14:m xmlns:m="http://schemas.openxmlformats.org/officeDocument/2006/math">
+                  <m:oMath>
+                    <m:bar>
+                      <m:barPr>
+                        <m:pos m:val="top"/>
+                      </m:barPr>
+                      <m:e>
+                        <m:r>
+                          <a:rPr lang="vi-VN" sz="2400" b="1" i="1">
+                            <a:solidFill>
+                              <a:srgbClr val="991B1B"/>
+                            </a:solidFill>
+                            <a:latin typeface="Cambria Math" panose="02040503050406030204" pitchFamily="18" charset="0"/>
+                          </a:rPr>
+                          <m:t>Q</m:t>
+                        </m:r>
+                      </m:e>
+                    </m:bar>
+                  </m:oMath>
+                </a14:m>
+                <a:r>
+                  <a:rPr sz="2400" b="1">
+                    <a:solidFill>
+                      <a:srgbClr val="991B1B"/>
+                    </a:solidFill>
+                    <a:latin typeface="Calibri"/>
+                  </a:rPr>
+                  <a:t> sai (vì x = 0)</a:t>
+                </a:r>
+              </a:p>
+            </p:txBody>
+          </p:sp>
+        </mc:Choice>
+        <mc:Fallback>
+          <p:sp>
+            <p:nvSpPr>
+              <p:cNvPr id="8" name="TextBox 7"/>
+              <p:cNvSpPr txBox="1"/>
+              <p:nvPr/>
+            </p:nvSpPr>
+            <p:spPr>
+              <a:xfrm>
+                <a:off x="914400" y="3913632"/>
+                <a:ext cx="8321040" cy="685800"/>
+              </a:xfrm>
+              <a:prstGeom prst="rect">
+                <a:avLst/>
+              </a:prstGeom>
+              <a:noFill/>
+            </p:spPr>
+            <p:txBody>
+              <a:bodyPr wrap="square" anchor="ctr">
+                <a:spAutoFit/>
+              </a:bodyPr>
+              <a:lstStyle/>
+              <a:p>
+                <a:pPr algn="l">
+                  <a:spcAft>
+                    <a:spcPts val="400"/>
+                  </a:spcAft>
+                </a:pPr>
+                <a:r>
+                  <a:rPr lang="vi-VN"/>
+                  <a:t>P̅</a:t>
+                </a:r>
+                <a:r>
+                  <a:rPr sz="2400" b="1">
+                    <a:solidFill>
+                      <a:srgbClr val="991B1B"/>
+                    </a:solidFill>
+                    <a:latin typeface="Calibri"/>
+                  </a:rPr>
+                  <a:t> đúng; </a:t>
+                </a:r>
+                <a:r>
+                  <a:rPr lang="vi-VN"/>
+                  <a:t>Q̅</a:t>
+                </a:r>
+                <a:r>
+                  <a:rPr sz="2400" b="1">
+                    <a:solidFill>
+                      <a:srgbClr val="991B1B"/>
+                    </a:solidFill>
+                    <a:latin typeface="Calibri"/>
+                  </a:rPr>
+                  <a:t> sai (vì x = 0)</a:t>
+                </a:r>
+              </a:p>
+            </p:txBody>
+          </p:sp>
+        </mc:Fallback>
+      </mc:AlternateContent>
+      <p:sp>
+        <p:nvSpPr>
+          <p:cNvPr id="9" name="Rounded Rectangle 8"/>
+          <p:cNvSpPr/>
+          <p:nvPr/>
+        </p:nvSpPr>
+        <p:spPr>
+          <a:xfrm>
+            <a:off x="10463479" y="457200"/>
+            <a:ext cx="1179576" cy="457200"/>
+          </a:xfrm>
+          <a:prstGeom prst="roundRect">
+            <a:avLst/>
+          </a:prstGeom>
+          <a:solidFill>
+            <a:srgbClr val="166534"/>
+          </a:solidFill>
+          <a:ln>
+            <a:noFill/>
+          </a:ln>
+          <a:effectLst/>
+        </p:spPr>
+        <p:style>
+          <a:lnRef idx="1">
+            <a:schemeClr val="accent1"/>
+          </a:lnRef>
+          <a:fillRef idx="3">
+            <a:schemeClr val="accent1"/>
+          </a:fillRef>
+          <a:effectRef idx="2">
+            <a:schemeClr val="accent1"/>
+          </a:effectRef>
+          <a:fontRef idx="minor">
+            <a:schemeClr val="lt1"/>
+          </a:fontRef>
+        </p:style>
+        <p:txBody>
+          <a:bodyPr rtlCol="0" anchor="ctr" tIns="0" bIns="0"/>
+          <a:lstStyle/>
+          <a:p>
+            <a:pPr algn="ctr"/>
+            <a:r>
+              <a:rPr sz="1400" b="1">
+                <a:solidFill>
+                  <a:srgbClr val="FFFFFF"/>
+                </a:solidFill>
+                <a:latin typeface="Arial"/>
+              </a:rPr>
+              <a:t>LỜI GIẢI</a:t>
+            </a:r>
+          </a:p>
+        </p:txBody>
+      </p:sp>
     </p:spTree>
   </p:cSld>
   <p:clrMapOvr>
@@ -3863,7 +4153,7 @@
                 </a:solidFill>
                 <a:latin typeface="Arial"/>
               </a:rPr>
-              <a:t>4. MỆNH ĐỀ ĐẢO</a:t>
+              <a:t>3. MỆNH ĐỀ KÉO THEO</a:t>
             </a:r>
           </a:p>
         </p:txBody>
@@ -3942,7 +4232,7 @@
                 </a:solidFill>
                 <a:latin typeface="Calibri"/>
               </a:rPr>
-              <a:t>Toán 10 · Bài 1. Mệnh đề          13</a:t>
+              <a:t>Toán 10 · Bài 1. Mệnh đề          11</a:t>
             </a:r>
           </a:p>
         </p:txBody>
@@ -3956,7 +4246,7 @@
         <p:spPr>
           <a:xfrm>
             <a:off x="731520" y="1508760"/>
-            <a:ext cx="10789920" cy="2267712"/>
+            <a:ext cx="6400800" cy="1700784"/>
           </a:xfrm>
           <a:prstGeom prst="rect">
             <a:avLst/>
@@ -3981,7 +4271,7 @@
                 </a:solidFill>
                 <a:latin typeface="Calibri"/>
               </a:rPr>
-              <a:t>Đảo của P ⇒ Q:  Q ⇒ P</a:t>
+              <a:t>“Nếu P thì Q”: P ⇒ Q</a:t>
             </a:r>
           </a:p>
           <a:p>
@@ -4002,7 +4292,7 @@
                 </a:solidFill>
                 <a:latin typeface="Calibri"/>
               </a:rPr>
-              <a:t>Tam giác đều ⇒ tam giác cân: đúng</a:t>
+              <a:t>P: tam giác ABC vuông tại A</a:t>
             </a:r>
           </a:p>
           <a:p>
@@ -4023,28 +4313,7 @@
                 </a:solidFill>
                 <a:latin typeface="Calibri"/>
               </a:rPr>
-              <a:t>Tam giác cân ⇒ tam giác đều: sai</a:t>
-            </a:r>
-          </a:p>
-          <a:p>
-            <a:pPr algn="l" marL="365760" indent="-365760">
-              <a:spcAft>
-                <a:spcPts val="1000"/>
-              </a:spcAft>
-              <a:buClr>
-                <a:srgbClr val="1E40AF"/>
-              </a:buClr>
-              <a:buFont typeface="Arial"/>
-              <a:buChar char="•"/>
-            </a:pPr>
-            <a:r>
-              <a:rPr sz="2400">
-                <a:solidFill>
-                  <a:srgbClr val="1E293B"/>
-                </a:solidFill>
-                <a:latin typeface="Calibri"/>
-              </a:rPr>
-              <a:t>Phản ví dụ: cân, góc đỉnh 40°</a:t>
+              <a:t>Q: AB² + AC² = BC²</a:t>
             </a:r>
           </a:p>
         </p:txBody>
@@ -4057,8 +4326,8 @@
         </p:nvSpPr>
         <p:spPr>
           <a:xfrm>
-            <a:off x="731520" y="3913632"/>
-            <a:ext cx="8686800" cy="1143000"/>
+            <a:off x="731520" y="3346704"/>
+            <a:ext cx="6400800" cy="1143000"/>
           </a:xfrm>
           <a:prstGeom prst="roundRect">
             <a:avLst>
@@ -4105,8 +4374,8 @@
         </p:nvSpPr>
         <p:spPr>
           <a:xfrm>
-            <a:off x="914400" y="3913632"/>
-            <a:ext cx="8321040" cy="1143000"/>
+            <a:off x="914400" y="3346704"/>
+            <a:ext cx="6035040" cy="1143000"/>
           </a:xfrm>
           <a:prstGeom prst="rect">
             <a:avLst/>
@@ -4131,7 +4400,7 @@
                 </a:solidFill>
                 <a:latin typeface="Calibri"/>
               </a:rPr>
-              <a:t>Đảo của mệnh đề đúng</a:t>
+              <a:t>P ⇒ Q chỉ sai khi:</a:t>
             </a:r>
           </a:p>
           <a:p>
@@ -4147,11 +4416,35 @@
                 </a:solidFill>
                 <a:latin typeface="Calibri"/>
               </a:rPr>
-              <a:t>chưa chắc là mệnh đề đúng</a:t>
-            </a:r>
-          </a:p>
-        </p:txBody>
-      </p:sp>
+              <a:t>P đúng và Q sai</a:t>
+            </a:r>
+          </a:p>
+        </p:txBody>
+      </p:sp>
+      <p:pic>
+        <p:nvPicPr>
+          <p:cNvPr id="9" name="Picture 8" descr="rId12.png"/>
+          <p:cNvPicPr>
+            <a:picLocks noChangeAspect="1"/>
+          </p:cNvPicPr>
+          <p:nvPr/>
+        </p:nvPicPr>
+        <p:blipFill>
+          <a:blip r:embed="rId2"/>
+          <a:stretch>
+            <a:fillRect/>
+          </a:stretch>
+        </p:blipFill>
+        <p:spPr>
+          <a:xfrm>
+            <a:off x="7406640" y="2199916"/>
+            <a:ext cx="4389120" cy="3235408"/>
+          </a:xfrm>
+          <a:prstGeom prst="rect">
+            <a:avLst/>
+          </a:prstGeom>
+        </p:spPr>
+      </p:pic>
     </p:spTree>
   </p:cSld>
   <p:clrMapOvr>
@@ -4251,7 +4544,7 @@
                 </a:solidFill>
                 <a:latin typeface="Arial"/>
               </a:rPr>
-              <a:t>5. MỆNH ĐỀ TƯƠNG ĐƯƠNG</a:t>
+              <a:t>ĐỊNH LÍ – ĐIỀU KIỆN CẦN, ĐỦ</a:t>
             </a:r>
           </a:p>
         </p:txBody>
@@ -4330,7 +4623,7 @@
                 </a:solidFill>
                 <a:latin typeface="Calibri"/>
               </a:rPr>
-              <a:t>Toán 10 · Bài 1. Mệnh đề          14</a:t>
+              <a:t>Toán 10 · Bài 1. Mệnh đề          12</a:t>
             </a:r>
           </a:p>
         </p:txBody>
@@ -4344,7 +4637,7 @@
         <p:spPr>
           <a:xfrm>
             <a:off x="731520" y="1508760"/>
-            <a:ext cx="10789920" cy="2267712"/>
+            <a:ext cx="6400800" cy="2267712"/>
           </a:xfrm>
           <a:prstGeom prst="rect">
             <a:avLst/>
@@ -4369,7 +4662,7 @@
                 </a:solidFill>
                 <a:latin typeface="Calibri"/>
               </a:rPr>
-              <a:t>P ⇔ Q đọc: P tương đương Q</a:t>
+              <a:t>Định lí thường có dạng P ⇒ Q</a:t>
             </a:r>
           </a:p>
           <a:p>
@@ -4390,7 +4683,7 @@
                 </a:solidFill>
                 <a:latin typeface="Calibri"/>
               </a:rPr>
-              <a:t>P là điều kiện cần và đủ</a:t>
+              <a:t>P: giả thiết;  Q: kết luận</a:t>
             </a:r>
           </a:p>
           <a:p>
@@ -4411,7 +4704,7 @@
                 </a:solidFill>
                 <a:latin typeface="Calibri"/>
               </a:rPr>
-              <a:t>P khi và chỉ khi Q</a:t>
+              <a:t>Ví dụ: tổng hai góc đối 180°</a:t>
             </a:r>
           </a:p>
           <a:p>
@@ -4432,7 +4725,7 @@
                 </a:solidFill>
                 <a:latin typeface="Calibri"/>
               </a:rPr>
-              <a:t>n ⋮ 5 ⇔ tận cùng là 0, 5</a:t>
+              <a:t>⇒ ABCD nội tiếp đường tròn</a:t>
             </a:r>
           </a:p>
         </p:txBody>
@@ -4446,7 +4739,7 @@
         <p:spPr>
           <a:xfrm>
             <a:off x="731520" y="3913632"/>
-            <a:ext cx="8686800" cy="1143000"/>
+            <a:ext cx="6400800" cy="1143000"/>
           </a:xfrm>
           <a:prstGeom prst="roundRect">
             <a:avLst>
@@ -4494,7 +4787,7 @@
         <p:spPr>
           <a:xfrm>
             <a:off x="914400" y="3913632"/>
-            <a:ext cx="8321040" cy="1143000"/>
+            <a:ext cx="6035040" cy="1143000"/>
           </a:xfrm>
           <a:prstGeom prst="rect">
             <a:avLst/>
@@ -4519,7 +4812,7 @@
                 </a:solidFill>
                 <a:latin typeface="Calibri"/>
               </a:rPr>
-              <a:t>P ⇔ Q đúng khi P ⇒ Q</a:t>
+              <a:t>P là điều kiện đủ để có Q</a:t>
             </a:r>
           </a:p>
           <a:p>
@@ -4535,11 +4828,35 @@
                 </a:solidFill>
                 <a:latin typeface="Calibri"/>
               </a:rPr>
-              <a:t>và Q ⇒ P đều đúng</a:t>
-            </a:r>
-          </a:p>
-        </p:txBody>
-      </p:sp>
+              <a:t>Q là điều kiện cần để có P</a:t>
+            </a:r>
+          </a:p>
+        </p:txBody>
+      </p:sp>
+      <p:pic>
+        <p:nvPicPr>
+          <p:cNvPr id="9" name="Picture 8" descr="rId13.png"/>
+          <p:cNvPicPr>
+            <a:picLocks noChangeAspect="1"/>
+          </p:cNvPicPr>
+          <p:nvPr/>
+        </p:nvPicPr>
+        <p:blipFill>
+          <a:blip r:embed="rId2"/>
+          <a:stretch>
+            <a:fillRect/>
+          </a:stretch>
+        </p:blipFill>
+        <p:spPr>
+          <a:xfrm>
+            <a:off x="7406640" y="1866900"/>
+            <a:ext cx="4389120" cy="3901440"/>
+          </a:xfrm>
+          <a:prstGeom prst="rect">
+            <a:avLst/>
+          </a:prstGeom>
+        </p:spPr>
+      </p:pic>
     </p:spTree>
   </p:cSld>
   <p:clrMapOvr>
@@ -4639,7 +4956,7 @@
                 </a:solidFill>
                 <a:latin typeface="Arial"/>
               </a:rPr>
-              <a:t>6. KÍ HIỆU ∀ VÀ ∃</a:t>
+              <a:t>4. MỆNH ĐỀ ĐẢO</a:t>
             </a:r>
           </a:p>
         </p:txBody>
@@ -4718,7 +5035,7 @@
                 </a:solidFill>
                 <a:latin typeface="Calibri"/>
               </a:rPr>
-              <a:t>Toán 10 · Bài 1. Mệnh đề          15</a:t>
+              <a:t>Toán 10 · Bài 1. Mệnh đề          13</a:t>
             </a:r>
           </a:p>
         </p:txBody>
@@ -4732,7 +5049,7 @@
         <p:spPr>
           <a:xfrm>
             <a:off x="731520" y="1508760"/>
-            <a:ext cx="10789920" cy="1700784"/>
+            <a:ext cx="10789920" cy="2267712"/>
           </a:xfrm>
           <a:prstGeom prst="rect">
             <a:avLst/>
@@ -4744,6 +5061,22 @@
             <a:spAutoFit/>
           </a:bodyPr>
           <a:lstStyle/>
+          <a:p>
+            <a:pPr algn="l">
+              <a:spcAft>
+                <a:spcPts val="1000"/>
+              </a:spcAft>
+            </a:pPr>
+            <a:r>
+              <a:rPr sz="2400" b="1">
+                <a:solidFill>
+                  <a:srgbClr val="1E40AF"/>
+                </a:solidFill>
+                <a:latin typeface="Calibri"/>
+              </a:rPr>
+              <a:t>Đảo của P ⇒ Q:  Q ⇒ P</a:t>
+            </a:r>
+          </a:p>
           <a:p>
             <a:pPr algn="l" marL="365760" indent="-365760">
               <a:spcAft>
@@ -4762,7 +5095,7 @@
                 </a:solidFill>
                 <a:latin typeface="Calibri"/>
               </a:rPr>
-              <a:t>∀: “với mọi”;   ∃: “tồn tại”</a:t>
+              <a:t>Tam giác đều ⇒ tam giác cân: đúng</a:t>
             </a:r>
           </a:p>
           <a:p>
@@ -4783,7 +5116,7 @@
                 </a:solidFill>
                 <a:latin typeface="Calibri"/>
               </a:rPr>
-              <a:t>P: ∀x ∈ ℝ, x² ≥ 0  –  đúng</a:t>
+              <a:t>Tam giác cân ⇒ tam giác đều: sai</a:t>
             </a:r>
           </a:p>
           <a:p>
@@ -4804,6 +5137,766 @@
                 </a:solidFill>
                 <a:latin typeface="Calibri"/>
               </a:rPr>
+              <a:t>Phản ví dụ: cân, góc đỉnh 40°</a:t>
+            </a:r>
+          </a:p>
+        </p:txBody>
+      </p:sp>
+      <p:sp>
+        <p:nvSpPr>
+          <p:cNvPr id="7" name="Rounded Rectangle 6"/>
+          <p:cNvSpPr/>
+          <p:nvPr/>
+        </p:nvSpPr>
+        <p:spPr>
+          <a:xfrm>
+            <a:off x="731520" y="3913632"/>
+            <a:ext cx="8686800" cy="1143000"/>
+          </a:xfrm>
+          <a:prstGeom prst="roundRect">
+            <a:avLst>
+              <a:gd name="adj" fmla="val 8000"/>
+            </a:avLst>
+          </a:prstGeom>
+          <a:solidFill>
+            <a:srgbClr val="FEF2F2"/>
+          </a:solidFill>
+          <a:ln w="19050">
+            <a:solidFill>
+              <a:srgbClr val="991B1B"/>
+            </a:solidFill>
+          </a:ln>
+          <a:effectLst/>
+        </p:spPr>
+        <p:style>
+          <a:lnRef idx="1">
+            <a:schemeClr val="accent1"/>
+          </a:lnRef>
+          <a:fillRef idx="3">
+            <a:schemeClr val="accent1"/>
+          </a:fillRef>
+          <a:effectRef idx="2">
+            <a:schemeClr val="accent1"/>
+          </a:effectRef>
+          <a:fontRef idx="minor">
+            <a:schemeClr val="lt1"/>
+          </a:fontRef>
+        </p:style>
+        <p:txBody>
+          <a:bodyPr rtlCol="0" anchor="ctr"/>
+          <a:lstStyle/>
+          <a:p>
+            <a:pPr algn="ctr"/>
+          </a:p>
+        </p:txBody>
+      </p:sp>
+      <p:sp>
+        <p:nvSpPr>
+          <p:cNvPr id="8" name="TextBox 7"/>
+          <p:cNvSpPr txBox="1"/>
+          <p:nvPr/>
+        </p:nvSpPr>
+        <p:spPr>
+          <a:xfrm>
+            <a:off x="914400" y="3913632"/>
+            <a:ext cx="8321040" cy="1143000"/>
+          </a:xfrm>
+          <a:prstGeom prst="rect">
+            <a:avLst/>
+          </a:prstGeom>
+          <a:noFill/>
+        </p:spPr>
+        <p:txBody>
+          <a:bodyPr wrap="square" anchor="ctr">
+            <a:spAutoFit/>
+          </a:bodyPr>
+          <a:lstStyle/>
+          <a:p>
+            <a:pPr algn="l">
+              <a:spcAft>
+                <a:spcPts val="400"/>
+              </a:spcAft>
+            </a:pPr>
+            <a:r>
+              <a:rPr sz="2400" b="1">
+                <a:solidFill>
+                  <a:srgbClr val="991B1B"/>
+                </a:solidFill>
+                <a:latin typeface="Calibri"/>
+              </a:rPr>
+              <a:t>Đảo của mệnh đề đúng</a:t>
+            </a:r>
+          </a:p>
+          <a:p>
+            <a:pPr algn="l">
+              <a:spcAft>
+                <a:spcPts val="400"/>
+              </a:spcAft>
+            </a:pPr>
+            <a:r>
+              <a:rPr sz="2400" b="1">
+                <a:solidFill>
+                  <a:srgbClr val="991B1B"/>
+                </a:solidFill>
+                <a:latin typeface="Calibri"/>
+              </a:rPr>
+              <a:t>chưa chắc là mệnh đề đúng</a:t>
+            </a:r>
+          </a:p>
+        </p:txBody>
+      </p:sp>
+    </p:spTree>
+  </p:cSld>
+  <p:clrMapOvr>
+    <a:masterClrMapping/>
+  </p:clrMapOvr>
+</p:sld>
+</file>
+
+<file path=ppt/slides/slide14.xml><?xml version="1.0" encoding="utf-8"?>
+<p:sld xmlns:a="http://schemas.openxmlformats.org/drawingml/2006/main" xmlns:p="http://schemas.openxmlformats.org/presentationml/2006/main" xmlns:r="http://schemas.openxmlformats.org/officeDocument/2006/relationships">
+  <p:cSld>
+    <p:bg>
+      <p:bgPr>
+        <a:solidFill>
+          <a:srgbClr val="FFFFFF"/>
+        </a:solidFill>
+        <a:effectLst/>
+      </p:bgPr>
+    </p:bg>
+    <p:spTree>
+      <p:nvGrpSpPr>
+        <p:cNvPr id="1" name=""/>
+        <p:cNvGrpSpPr/>
+        <p:nvPr/>
+      </p:nvGrpSpPr>
+      <p:grpSpPr/>
+      <p:sp>
+        <p:nvSpPr>
+          <p:cNvPr id="2" name="Rectangle 1"/>
+          <p:cNvSpPr/>
+          <p:nvPr/>
+        </p:nvSpPr>
+        <p:spPr>
+          <a:xfrm>
+            <a:off x="457200" y="384048"/>
+            <a:ext cx="109728" cy="658368"/>
+          </a:xfrm>
+          <a:prstGeom prst="rect">
+            <a:avLst/>
+          </a:prstGeom>
+          <a:solidFill>
+            <a:srgbClr val="1E40AF"/>
+          </a:solidFill>
+          <a:ln>
+            <a:noFill/>
+          </a:ln>
+          <a:effectLst/>
+        </p:spPr>
+        <p:style>
+          <a:lnRef idx="1">
+            <a:schemeClr val="accent1"/>
+          </a:lnRef>
+          <a:fillRef idx="3">
+            <a:schemeClr val="accent1"/>
+          </a:fillRef>
+          <a:effectRef idx="2">
+            <a:schemeClr val="accent1"/>
+          </a:effectRef>
+          <a:fontRef idx="minor">
+            <a:schemeClr val="lt1"/>
+          </a:fontRef>
+        </p:style>
+        <p:txBody>
+          <a:bodyPr rtlCol="0" anchor="ctr"/>
+          <a:lstStyle/>
+          <a:p>
+            <a:pPr algn="ctr"/>
+          </a:p>
+        </p:txBody>
+      </p:sp>
+      <p:sp>
+        <p:nvSpPr>
+          <p:cNvPr id="3" name="TextBox 2"/>
+          <p:cNvSpPr txBox="1"/>
+          <p:nvPr/>
+        </p:nvSpPr>
+        <p:spPr>
+          <a:xfrm>
+            <a:off x="731520" y="274320"/>
+            <a:ext cx="10972800" cy="868680"/>
+          </a:xfrm>
+          <a:prstGeom prst="rect">
+            <a:avLst/>
+          </a:prstGeom>
+          <a:noFill/>
+        </p:spPr>
+        <p:txBody>
+          <a:bodyPr wrap="none" anchor="ctr">
+            <a:spAutoFit/>
+          </a:bodyPr>
+          <a:lstStyle/>
+          <a:p>
+            <a:r>
+              <a:rPr sz="3600" b="1">
+                <a:solidFill>
+                  <a:srgbClr val="1E40AF"/>
+                </a:solidFill>
+                <a:latin typeface="Arial"/>
+              </a:rPr>
+              <a:t>5. MỆNH ĐỀ TƯƠNG ĐƯƠNG</a:t>
+            </a:r>
+          </a:p>
+        </p:txBody>
+      </p:sp>
+      <p:sp>
+        <p:nvSpPr>
+          <p:cNvPr id="4" name="Rectangle 3"/>
+          <p:cNvSpPr/>
+          <p:nvPr/>
+        </p:nvSpPr>
+        <p:spPr>
+          <a:xfrm>
+            <a:off x="457200" y="1207008"/>
+            <a:ext cx="11274552" cy="22000"/>
+          </a:xfrm>
+          <a:prstGeom prst="rect">
+            <a:avLst/>
+          </a:prstGeom>
+          <a:solidFill>
+            <a:srgbClr val="E2E8F0"/>
+          </a:solidFill>
+          <a:ln>
+            <a:noFill/>
+          </a:ln>
+          <a:effectLst/>
+        </p:spPr>
+        <p:style>
+          <a:lnRef idx="1">
+            <a:schemeClr val="accent1"/>
+          </a:lnRef>
+          <a:fillRef idx="3">
+            <a:schemeClr val="accent1"/>
+          </a:fillRef>
+          <a:effectRef idx="2">
+            <a:schemeClr val="accent1"/>
+          </a:effectRef>
+          <a:fontRef idx="minor">
+            <a:schemeClr val="lt1"/>
+          </a:fontRef>
+        </p:style>
+        <p:txBody>
+          <a:bodyPr rtlCol="0" anchor="ctr"/>
+          <a:lstStyle/>
+          <a:p>
+            <a:pPr algn="ctr"/>
+          </a:p>
+        </p:txBody>
+      </p:sp>
+      <p:sp>
+        <p:nvSpPr>
+          <p:cNvPr id="5" name="TextBox 4"/>
+          <p:cNvSpPr txBox="1"/>
+          <p:nvPr/>
+        </p:nvSpPr>
+        <p:spPr>
+          <a:xfrm>
+            <a:off x="457200" y="6355080"/>
+            <a:ext cx="11274552" cy="365760"/>
+          </a:xfrm>
+          <a:prstGeom prst="rect">
+            <a:avLst/>
+          </a:prstGeom>
+          <a:noFill/>
+        </p:spPr>
+        <p:txBody>
+          <a:bodyPr wrap="none">
+            <a:spAutoFit/>
+          </a:bodyPr>
+          <a:lstStyle/>
+          <a:p>
+            <a:pPr algn="r"/>
+            <a:r>
+              <a:rPr sz="1200">
+                <a:solidFill>
+                  <a:srgbClr val="64748B"/>
+                </a:solidFill>
+                <a:latin typeface="Calibri"/>
+              </a:rPr>
+              <a:t>Toán 10 · Bài 1. Mệnh đề          14</a:t>
+            </a:r>
+          </a:p>
+        </p:txBody>
+      </p:sp>
+      <p:sp>
+        <p:nvSpPr>
+          <p:cNvPr id="6" name="TextBox 5"/>
+          <p:cNvSpPr txBox="1"/>
+          <p:nvPr/>
+        </p:nvSpPr>
+        <p:spPr>
+          <a:xfrm>
+            <a:off x="731520" y="1508760"/>
+            <a:ext cx="10789920" cy="2267712"/>
+          </a:xfrm>
+          <a:prstGeom prst="rect">
+            <a:avLst/>
+          </a:prstGeom>
+          <a:noFill/>
+        </p:spPr>
+        <p:txBody>
+          <a:bodyPr wrap="square" anchor="t">
+            <a:spAutoFit/>
+          </a:bodyPr>
+          <a:lstStyle/>
+          <a:p>
+            <a:pPr algn="l">
+              <a:spcAft>
+                <a:spcPts val="1000"/>
+              </a:spcAft>
+            </a:pPr>
+            <a:r>
+              <a:rPr sz="2400" b="1">
+                <a:solidFill>
+                  <a:srgbClr val="1E40AF"/>
+                </a:solidFill>
+                <a:latin typeface="Calibri"/>
+              </a:rPr>
+              <a:t>P ⇔ Q đọc: P tương đương Q</a:t>
+            </a:r>
+          </a:p>
+          <a:p>
+            <a:pPr algn="l" marL="365760" indent="-365760">
+              <a:spcAft>
+                <a:spcPts val="1000"/>
+              </a:spcAft>
+              <a:buClr>
+                <a:srgbClr val="1E40AF"/>
+              </a:buClr>
+              <a:buFont typeface="Arial"/>
+              <a:buChar char="•"/>
+            </a:pPr>
+            <a:r>
+              <a:rPr sz="2400">
+                <a:solidFill>
+                  <a:srgbClr val="1E293B"/>
+                </a:solidFill>
+                <a:latin typeface="Calibri"/>
+              </a:rPr>
+              <a:t>P là điều kiện cần và đủ</a:t>
+            </a:r>
+          </a:p>
+          <a:p>
+            <a:pPr algn="l" marL="365760" indent="-365760">
+              <a:spcAft>
+                <a:spcPts val="1000"/>
+              </a:spcAft>
+              <a:buClr>
+                <a:srgbClr val="1E40AF"/>
+              </a:buClr>
+              <a:buFont typeface="Arial"/>
+              <a:buChar char="•"/>
+            </a:pPr>
+            <a:r>
+              <a:rPr sz="2400">
+                <a:solidFill>
+                  <a:srgbClr val="1E293B"/>
+                </a:solidFill>
+                <a:latin typeface="Calibri"/>
+              </a:rPr>
+              <a:t>P khi và chỉ khi Q</a:t>
+            </a:r>
+          </a:p>
+          <a:p>
+            <a:pPr algn="l" marL="365760" indent="-365760">
+              <a:spcAft>
+                <a:spcPts val="1000"/>
+              </a:spcAft>
+              <a:buClr>
+                <a:srgbClr val="1E40AF"/>
+              </a:buClr>
+              <a:buFont typeface="Arial"/>
+              <a:buChar char="•"/>
+            </a:pPr>
+            <a:r>
+              <a:rPr sz="2400">
+                <a:solidFill>
+                  <a:srgbClr val="1E293B"/>
+                </a:solidFill>
+                <a:latin typeface="Calibri"/>
+              </a:rPr>
+              <a:t>n ⋮ 5 ⇔ tận cùng là 0, 5</a:t>
+            </a:r>
+          </a:p>
+        </p:txBody>
+      </p:sp>
+      <p:sp>
+        <p:nvSpPr>
+          <p:cNvPr id="7" name="Rounded Rectangle 6"/>
+          <p:cNvSpPr/>
+          <p:nvPr/>
+        </p:nvSpPr>
+        <p:spPr>
+          <a:xfrm>
+            <a:off x="731520" y="3913632"/>
+            <a:ext cx="8686800" cy="1143000"/>
+          </a:xfrm>
+          <a:prstGeom prst="roundRect">
+            <a:avLst>
+              <a:gd name="adj" fmla="val 8000"/>
+            </a:avLst>
+          </a:prstGeom>
+          <a:solidFill>
+            <a:srgbClr val="FEF2F2"/>
+          </a:solidFill>
+          <a:ln w="19050">
+            <a:solidFill>
+              <a:srgbClr val="991B1B"/>
+            </a:solidFill>
+          </a:ln>
+          <a:effectLst/>
+        </p:spPr>
+        <p:style>
+          <a:lnRef idx="1">
+            <a:schemeClr val="accent1"/>
+          </a:lnRef>
+          <a:fillRef idx="3">
+            <a:schemeClr val="accent1"/>
+          </a:fillRef>
+          <a:effectRef idx="2">
+            <a:schemeClr val="accent1"/>
+          </a:effectRef>
+          <a:fontRef idx="minor">
+            <a:schemeClr val="lt1"/>
+          </a:fontRef>
+        </p:style>
+        <p:txBody>
+          <a:bodyPr rtlCol="0" anchor="ctr"/>
+          <a:lstStyle/>
+          <a:p>
+            <a:pPr algn="ctr"/>
+          </a:p>
+        </p:txBody>
+      </p:sp>
+      <p:sp>
+        <p:nvSpPr>
+          <p:cNvPr id="8" name="TextBox 7"/>
+          <p:cNvSpPr txBox="1"/>
+          <p:nvPr/>
+        </p:nvSpPr>
+        <p:spPr>
+          <a:xfrm>
+            <a:off x="914400" y="3913632"/>
+            <a:ext cx="8321040" cy="1143000"/>
+          </a:xfrm>
+          <a:prstGeom prst="rect">
+            <a:avLst/>
+          </a:prstGeom>
+          <a:noFill/>
+        </p:spPr>
+        <p:txBody>
+          <a:bodyPr wrap="square" anchor="ctr">
+            <a:spAutoFit/>
+          </a:bodyPr>
+          <a:lstStyle/>
+          <a:p>
+            <a:pPr algn="l">
+              <a:spcAft>
+                <a:spcPts val="400"/>
+              </a:spcAft>
+            </a:pPr>
+            <a:r>
+              <a:rPr sz="2400" b="1">
+                <a:solidFill>
+                  <a:srgbClr val="991B1B"/>
+                </a:solidFill>
+                <a:latin typeface="Calibri"/>
+              </a:rPr>
+              <a:t>P ⇔ Q đúng khi P ⇒ Q</a:t>
+            </a:r>
+          </a:p>
+          <a:p>
+            <a:pPr algn="l">
+              <a:spcAft>
+                <a:spcPts val="400"/>
+              </a:spcAft>
+            </a:pPr>
+            <a:r>
+              <a:rPr sz="2400" b="1">
+                <a:solidFill>
+                  <a:srgbClr val="991B1B"/>
+                </a:solidFill>
+                <a:latin typeface="Calibri"/>
+              </a:rPr>
+              <a:t>và Q ⇒ P đều đúng</a:t>
+            </a:r>
+          </a:p>
+        </p:txBody>
+      </p:sp>
+    </p:spTree>
+  </p:cSld>
+  <p:clrMapOvr>
+    <a:masterClrMapping/>
+  </p:clrMapOvr>
+</p:sld>
+</file>
+
+<file path=ppt/slides/slide15.xml><?xml version="1.0" encoding="utf-8"?>
+<p:sld xmlns:a="http://schemas.openxmlformats.org/drawingml/2006/main" xmlns:p="http://schemas.openxmlformats.org/presentationml/2006/main" xmlns:r="http://schemas.openxmlformats.org/officeDocument/2006/relationships">
+  <p:cSld>
+    <p:bg>
+      <p:bgPr>
+        <a:solidFill>
+          <a:srgbClr val="FFFFFF"/>
+        </a:solidFill>
+        <a:effectLst/>
+      </p:bgPr>
+    </p:bg>
+    <p:spTree>
+      <p:nvGrpSpPr>
+        <p:cNvPr id="1" name=""/>
+        <p:cNvGrpSpPr/>
+        <p:nvPr/>
+      </p:nvGrpSpPr>
+      <p:grpSpPr/>
+      <p:sp>
+        <p:nvSpPr>
+          <p:cNvPr id="2" name="Rectangle 1"/>
+          <p:cNvSpPr/>
+          <p:nvPr/>
+        </p:nvSpPr>
+        <p:spPr>
+          <a:xfrm>
+            <a:off x="457200" y="384048"/>
+            <a:ext cx="109728" cy="658368"/>
+          </a:xfrm>
+          <a:prstGeom prst="rect">
+            <a:avLst/>
+          </a:prstGeom>
+          <a:solidFill>
+            <a:srgbClr val="1E40AF"/>
+          </a:solidFill>
+          <a:ln>
+            <a:noFill/>
+          </a:ln>
+          <a:effectLst/>
+        </p:spPr>
+        <p:style>
+          <a:lnRef idx="1">
+            <a:schemeClr val="accent1"/>
+          </a:lnRef>
+          <a:fillRef idx="3">
+            <a:schemeClr val="accent1"/>
+          </a:fillRef>
+          <a:effectRef idx="2">
+            <a:schemeClr val="accent1"/>
+          </a:effectRef>
+          <a:fontRef idx="minor">
+            <a:schemeClr val="lt1"/>
+          </a:fontRef>
+        </p:style>
+        <p:txBody>
+          <a:bodyPr rtlCol="0" anchor="ctr"/>
+          <a:lstStyle/>
+          <a:p>
+            <a:pPr algn="ctr"/>
+          </a:p>
+        </p:txBody>
+      </p:sp>
+      <p:sp>
+        <p:nvSpPr>
+          <p:cNvPr id="3" name="TextBox 2"/>
+          <p:cNvSpPr txBox="1"/>
+          <p:nvPr/>
+        </p:nvSpPr>
+        <p:spPr>
+          <a:xfrm>
+            <a:off x="731520" y="274320"/>
+            <a:ext cx="10972800" cy="868680"/>
+          </a:xfrm>
+          <a:prstGeom prst="rect">
+            <a:avLst/>
+          </a:prstGeom>
+          <a:noFill/>
+        </p:spPr>
+        <p:txBody>
+          <a:bodyPr wrap="none" anchor="ctr">
+            <a:spAutoFit/>
+          </a:bodyPr>
+          <a:lstStyle/>
+          <a:p>
+            <a:r>
+              <a:rPr sz="3600" b="1">
+                <a:solidFill>
+                  <a:srgbClr val="1E40AF"/>
+                </a:solidFill>
+                <a:latin typeface="Arial"/>
+              </a:rPr>
+              <a:t>6. KÍ HIỆU ∀ VÀ ∃</a:t>
+            </a:r>
+          </a:p>
+        </p:txBody>
+      </p:sp>
+      <p:sp>
+        <p:nvSpPr>
+          <p:cNvPr id="4" name="Rectangle 3"/>
+          <p:cNvSpPr/>
+          <p:nvPr/>
+        </p:nvSpPr>
+        <p:spPr>
+          <a:xfrm>
+            <a:off x="457200" y="1207008"/>
+            <a:ext cx="11274552" cy="22000"/>
+          </a:xfrm>
+          <a:prstGeom prst="rect">
+            <a:avLst/>
+          </a:prstGeom>
+          <a:solidFill>
+            <a:srgbClr val="E2E8F0"/>
+          </a:solidFill>
+          <a:ln>
+            <a:noFill/>
+          </a:ln>
+          <a:effectLst/>
+        </p:spPr>
+        <p:style>
+          <a:lnRef idx="1">
+            <a:schemeClr val="accent1"/>
+          </a:lnRef>
+          <a:fillRef idx="3">
+            <a:schemeClr val="accent1"/>
+          </a:fillRef>
+          <a:effectRef idx="2">
+            <a:schemeClr val="accent1"/>
+          </a:effectRef>
+          <a:fontRef idx="minor">
+            <a:schemeClr val="lt1"/>
+          </a:fontRef>
+        </p:style>
+        <p:txBody>
+          <a:bodyPr rtlCol="0" anchor="ctr"/>
+          <a:lstStyle/>
+          <a:p>
+            <a:pPr algn="ctr"/>
+          </a:p>
+        </p:txBody>
+      </p:sp>
+      <p:sp>
+        <p:nvSpPr>
+          <p:cNvPr id="5" name="TextBox 4"/>
+          <p:cNvSpPr txBox="1"/>
+          <p:nvPr/>
+        </p:nvSpPr>
+        <p:spPr>
+          <a:xfrm>
+            <a:off x="457200" y="6355080"/>
+            <a:ext cx="11274552" cy="365760"/>
+          </a:xfrm>
+          <a:prstGeom prst="rect">
+            <a:avLst/>
+          </a:prstGeom>
+          <a:noFill/>
+        </p:spPr>
+        <p:txBody>
+          <a:bodyPr wrap="none">
+            <a:spAutoFit/>
+          </a:bodyPr>
+          <a:lstStyle/>
+          <a:p>
+            <a:pPr algn="r"/>
+            <a:r>
+              <a:rPr sz="1200">
+                <a:solidFill>
+                  <a:srgbClr val="64748B"/>
+                </a:solidFill>
+                <a:latin typeface="Calibri"/>
+              </a:rPr>
+              <a:t>Toán 10 · Bài 1. Mệnh đề          15</a:t>
+            </a:r>
+          </a:p>
+        </p:txBody>
+      </p:sp>
+      <p:sp>
+        <p:nvSpPr>
+          <p:cNvPr id="6" name="TextBox 5"/>
+          <p:cNvSpPr txBox="1"/>
+          <p:nvPr/>
+        </p:nvSpPr>
+        <p:spPr>
+          <a:xfrm>
+            <a:off x="731520" y="1508760"/>
+            <a:ext cx="10789920" cy="1700784"/>
+          </a:xfrm>
+          <a:prstGeom prst="rect">
+            <a:avLst/>
+          </a:prstGeom>
+          <a:noFill/>
+        </p:spPr>
+        <p:txBody>
+          <a:bodyPr wrap="square" anchor="t">
+            <a:spAutoFit/>
+          </a:bodyPr>
+          <a:lstStyle/>
+          <a:p>
+            <a:pPr algn="l" marL="365760" indent="-365760">
+              <a:spcAft>
+                <a:spcPts val="1000"/>
+              </a:spcAft>
+              <a:buClr>
+                <a:srgbClr val="1E40AF"/>
+              </a:buClr>
+              <a:buFont typeface="Arial"/>
+              <a:buChar char="•"/>
+            </a:pPr>
+            <a:r>
+              <a:rPr sz="2400">
+                <a:solidFill>
+                  <a:srgbClr val="1E293B"/>
+                </a:solidFill>
+                <a:latin typeface="Calibri"/>
+              </a:rPr>
+              <a:t>∀: “với mọi”;   ∃: “tồn tại”</a:t>
+            </a:r>
+          </a:p>
+          <a:p>
+            <a:pPr algn="l" marL="365760" indent="-365760">
+              <a:spcAft>
+                <a:spcPts val="1000"/>
+              </a:spcAft>
+              <a:buClr>
+                <a:srgbClr val="1E40AF"/>
+              </a:buClr>
+              <a:buFont typeface="Arial"/>
+              <a:buChar char="•"/>
+            </a:pPr>
+            <a:r>
+              <a:rPr sz="2400">
+                <a:solidFill>
+                  <a:srgbClr val="1E293B"/>
+                </a:solidFill>
+                <a:latin typeface="Calibri"/>
+              </a:rPr>
+              <a:t>P: ∀x ∈ ℝ, x² ≥ 0  –  đúng</a:t>
+            </a:r>
+          </a:p>
+          <a:p>
+            <a:pPr algn="l" marL="365760" indent="-365760">
+              <a:spcAft>
+                <a:spcPts val="1000"/>
+              </a:spcAft>
+              <a:buClr>
+                <a:srgbClr val="1E40AF"/>
+              </a:buClr>
+              <a:buFont typeface="Arial"/>
+              <a:buChar char="•"/>
+            </a:pPr>
+            <a:r>
+              <a:rPr sz="2400">
+                <a:solidFill>
+                  <a:srgbClr val="1E293B"/>
+                </a:solidFill>
+                <a:latin typeface="Calibri"/>
+              </a:rPr>
               <a:t>Q: ∃x ∈ ℚ, x² = 2  –  sai</a:t>
             </a:r>
           </a:p>
@@ -4841,7 +5934,7 @@
 </p:sld>
 </file>
 
-<file path=ppt/slides/slide14.xml><?xml version="1.0" encoding="utf-8"?>
+<file path=ppt/slides/slide16.xml><?xml version="1.0" encoding="utf-8"?>
 <p:sld xmlns:a="http://schemas.openxmlformats.org/drawingml/2006/main" xmlns:p="http://schemas.openxmlformats.org/presentationml/2006/main" xmlns:r="http://schemas.openxmlformats.org/officeDocument/2006/relationships">
   <p:cSld>
     <p:bg>
@@ -5322,7 +6415,7 @@
 </p:sld>
 </file>
 
-<file path=ppt/slides/slide15.xml><?xml version="1.0" encoding="utf-8"?>
+<file path=ppt/slides/slide17.xml><?xml version="1.0" encoding="utf-8"?>
 <p:sld xmlns:a="http://schemas.openxmlformats.org/drawingml/2006/main" xmlns:p="http://schemas.openxmlformats.org/presentationml/2006/main" xmlns:r="http://schemas.openxmlformats.org/officeDocument/2006/relationships">
   <p:cSld>
     <p:bg>
@@ -5393,7 +6486,7 @@
         <p:spPr>
           <a:xfrm>
             <a:off x="731520" y="274320"/>
-            <a:ext cx="10972800" cy="868680"/>
+            <a:ext cx="9848088" cy="868680"/>
           </a:xfrm>
           <a:prstGeom prst="rect">
             <a:avLst/>
@@ -5625,6 +6718,59 @@
           </a:p>
         </p:txBody>
       </p:sp>
+      <p:sp>
+        <p:nvSpPr>
+          <p:cNvPr id="7" name="Rounded Rectangle 6"/>
+          <p:cNvSpPr/>
+          <p:nvPr/>
+        </p:nvSpPr>
+        <p:spPr>
+          <a:xfrm>
+            <a:off x="10701223" y="457200"/>
+            <a:ext cx="941832" cy="457200"/>
+          </a:xfrm>
+          <a:prstGeom prst="roundRect">
+            <a:avLst/>
+          </a:prstGeom>
+          <a:solidFill>
+            <a:srgbClr val="1E40AF"/>
+          </a:solidFill>
+          <a:ln>
+            <a:noFill/>
+          </a:ln>
+          <a:effectLst/>
+        </p:spPr>
+        <p:style>
+          <a:lnRef idx="1">
+            <a:schemeClr val="accent1"/>
+          </a:lnRef>
+          <a:fillRef idx="3">
+            <a:schemeClr val="accent1"/>
+          </a:fillRef>
+          <a:effectRef idx="2">
+            <a:schemeClr val="accent1"/>
+          </a:effectRef>
+          <a:fontRef idx="minor">
+            <a:schemeClr val="lt1"/>
+          </a:fontRef>
+        </p:style>
+        <p:txBody>
+          <a:bodyPr rtlCol="0" anchor="ctr" tIns="0" bIns="0"/>
+          <a:lstStyle/>
+          <a:p>
+            <a:pPr algn="ctr"/>
+            <a:r>
+              <a:rPr sz="1400" b="1">
+                <a:solidFill>
+                  <a:srgbClr val="FFFFFF"/>
+                </a:solidFill>
+                <a:latin typeface="Arial"/>
+              </a:rPr>
+              <a:t>ĐỀ BÀI</a:t>
+            </a:r>
+          </a:p>
+        </p:txBody>
+      </p:sp>
     </p:spTree>
   </p:cSld>
   <p:clrMapOvr>
@@ -5633,7 +6779,7 @@
 </p:sld>
 </file>
 
-<file path=ppt/slides/slide16.xml><?xml version="1.0" encoding="utf-8"?>
+<file path=ppt/slides/slide18.xml><?xml version="1.0" encoding="utf-8"?>
 <p:sld xmlns:a="http://schemas.openxmlformats.org/drawingml/2006/main" xmlns:p="http://schemas.openxmlformats.org/presentationml/2006/main" xmlns:r="http://schemas.openxmlformats.org/officeDocument/2006/relationships">
   <p:cSld>
     <p:bg>
@@ -5704,7 +6850,453 @@
         <p:spPr>
           <a:xfrm>
             <a:off x="731520" y="274320"/>
-            <a:ext cx="10972800" cy="868680"/>
+            <a:ext cx="9610344" cy="868680"/>
+          </a:xfrm>
+          <a:prstGeom prst="rect">
+            <a:avLst/>
+          </a:prstGeom>
+          <a:noFill/>
+        </p:spPr>
+        <p:txBody>
+          <a:bodyPr wrap="none" anchor="ctr">
+            <a:spAutoFit/>
+          </a:bodyPr>
+          <a:lstStyle/>
+          <a:p>
+            <a:r>
+              <a:rPr sz="3600" b="1">
+                <a:solidFill>
+                  <a:srgbClr val="1E40AF"/>
+                </a:solidFill>
+                <a:latin typeface="Arial"/>
+              </a:rPr>
+              <a:t>LUYỆN TẬP 1.1</a:t>
+            </a:r>
+          </a:p>
+        </p:txBody>
+      </p:sp>
+      <p:sp>
+        <p:nvSpPr>
+          <p:cNvPr id="4" name="Rectangle 3"/>
+          <p:cNvSpPr/>
+          <p:nvPr/>
+        </p:nvSpPr>
+        <p:spPr>
+          <a:xfrm>
+            <a:off x="457200" y="1207008"/>
+            <a:ext cx="11274552" cy="22000"/>
+          </a:xfrm>
+          <a:prstGeom prst="rect">
+            <a:avLst/>
+          </a:prstGeom>
+          <a:solidFill>
+            <a:srgbClr val="E2E8F0"/>
+          </a:solidFill>
+          <a:ln>
+            <a:noFill/>
+          </a:ln>
+          <a:effectLst/>
+        </p:spPr>
+        <p:style>
+          <a:lnRef idx="1">
+            <a:schemeClr val="accent1"/>
+          </a:lnRef>
+          <a:fillRef idx="3">
+            <a:schemeClr val="accent1"/>
+          </a:fillRef>
+          <a:effectRef idx="2">
+            <a:schemeClr val="accent1"/>
+          </a:effectRef>
+          <a:fontRef idx="minor">
+            <a:schemeClr val="lt1"/>
+          </a:fontRef>
+        </p:style>
+        <p:txBody>
+          <a:bodyPr rtlCol="0" anchor="ctr"/>
+          <a:lstStyle/>
+          <a:p>
+            <a:pPr algn="ctr"/>
+          </a:p>
+        </p:txBody>
+      </p:sp>
+      <p:sp>
+        <p:nvSpPr>
+          <p:cNvPr id="5" name="TextBox 4"/>
+          <p:cNvSpPr txBox="1"/>
+          <p:nvPr/>
+        </p:nvSpPr>
+        <p:spPr>
+          <a:xfrm>
+            <a:off x="457200" y="6355080"/>
+            <a:ext cx="11274552" cy="365760"/>
+          </a:xfrm>
+          <a:prstGeom prst="rect">
+            <a:avLst/>
+          </a:prstGeom>
+          <a:noFill/>
+        </p:spPr>
+        <p:txBody>
+          <a:bodyPr wrap="none">
+            <a:spAutoFit/>
+          </a:bodyPr>
+          <a:lstStyle/>
+          <a:p>
+            <a:pPr algn="r"/>
+            <a:r>
+              <a:rPr sz="1200">
+                <a:solidFill>
+                  <a:srgbClr val="64748B"/>
+                </a:solidFill>
+                <a:latin typeface="Calibri"/>
+              </a:rPr>
+              <a:t>Toán 10 · Bài 1. Mệnh đề          18</a:t>
+            </a:r>
+          </a:p>
+        </p:txBody>
+      </p:sp>
+      <p:sp>
+        <p:nvSpPr>
+          <p:cNvPr id="6" name="TextBox 5"/>
+          <p:cNvSpPr txBox="1"/>
+          <p:nvPr/>
+        </p:nvSpPr>
+        <p:spPr>
+          <a:xfrm>
+            <a:off x="731520" y="1508760"/>
+            <a:ext cx="10789920" cy="2834640"/>
+          </a:xfrm>
+          <a:prstGeom prst="rect">
+            <a:avLst/>
+          </a:prstGeom>
+          <a:noFill/>
+        </p:spPr>
+        <p:txBody>
+          <a:bodyPr wrap="square" anchor="t">
+            <a:spAutoFit/>
+          </a:bodyPr>
+          <a:lstStyle/>
+          <a:p>
+            <a:pPr algn="l">
+              <a:spcAft>
+                <a:spcPts val="1000"/>
+              </a:spcAft>
+            </a:pPr>
+            <a:r>
+              <a:rPr sz="2400" b="1">
+                <a:solidFill>
+                  <a:srgbClr val="1E40AF"/>
+                </a:solidFill>
+                <a:latin typeface="Calibri"/>
+              </a:rPr>
+              <a:t>Câu nào là mệnh đề?</a:t>
+            </a:r>
+          </a:p>
+          <a:p>
+            <a:pPr algn="l" marL="365760" indent="-365760">
+              <a:spcAft>
+                <a:spcPts val="1000"/>
+              </a:spcAft>
+              <a:buClr>
+                <a:srgbClr val="1E40AF"/>
+              </a:buClr>
+              <a:buFont typeface="Arial"/>
+              <a:buChar char="•"/>
+            </a:pPr>
+            <a:r>
+              <a:rPr sz="2400">
+                <a:solidFill>
+                  <a:srgbClr val="1E293B"/>
+                </a:solidFill>
+                <a:latin typeface="Calibri"/>
+              </a:rPr>
+              <a:t>a) Trung Quốc đông dân nhất</a:t>
+            </a:r>
+          </a:p>
+          <a:p>
+            <a:pPr algn="l" marL="365760" indent="-365760">
+              <a:spcAft>
+                <a:spcPts val="1000"/>
+              </a:spcAft>
+              <a:buClr>
+                <a:srgbClr val="1E40AF"/>
+              </a:buClr>
+              <a:buFont typeface="Arial"/>
+              <a:buChar char="•"/>
+            </a:pPr>
+            <a:r>
+              <a:rPr sz="2400">
+                <a:solidFill>
+                  <a:srgbClr val="1E293B"/>
+                </a:solidFill>
+                <a:latin typeface="Calibri"/>
+              </a:rPr>
+              <a:t>b) Bạn học trường nào?</a:t>
+            </a:r>
+          </a:p>
+          <a:p>
+            <a:pPr algn="l" marL="365760" indent="-365760">
+              <a:spcAft>
+                <a:spcPts val="1000"/>
+              </a:spcAft>
+              <a:buClr>
+                <a:srgbClr val="1E40AF"/>
+              </a:buClr>
+              <a:buFont typeface="Arial"/>
+              <a:buChar char="•"/>
+            </a:pPr>
+            <a:r>
+              <a:rPr sz="2400">
+                <a:solidFill>
+                  <a:srgbClr val="1E293B"/>
+                </a:solidFill>
+                <a:latin typeface="Calibri"/>
+              </a:rPr>
+              <a:t>c) Không được làm việc riêng</a:t>
+            </a:r>
+          </a:p>
+          <a:p>
+            <a:pPr algn="l" marL="365760" indent="-365760">
+              <a:spcAft>
+                <a:spcPts val="1000"/>
+              </a:spcAft>
+              <a:buClr>
+                <a:srgbClr val="1E40AF"/>
+              </a:buClr>
+              <a:buFont typeface="Arial"/>
+              <a:buChar char="•"/>
+            </a:pPr>
+            <a:r>
+              <a:rPr sz="2400">
+                <a:solidFill>
+                  <a:srgbClr val="1E293B"/>
+                </a:solidFill>
+                <a:latin typeface="Calibri"/>
+              </a:rPr>
+              <a:t>d) Tôi sẽ sút trúng xà ngang</a:t>
+            </a:r>
+          </a:p>
+        </p:txBody>
+      </p:sp>
+      <p:sp>
+        <p:nvSpPr>
+          <p:cNvPr id="7" name="Rounded Rectangle 6"/>
+          <p:cNvSpPr/>
+          <p:nvPr/>
+        </p:nvSpPr>
+        <p:spPr>
+          <a:xfrm>
+            <a:off x="731520" y="4480560"/>
+            <a:ext cx="8686800" cy="685800"/>
+          </a:xfrm>
+          <a:prstGeom prst="roundRect">
+            <a:avLst>
+              <a:gd name="adj" fmla="val 8000"/>
+            </a:avLst>
+          </a:prstGeom>
+          <a:solidFill>
+            <a:srgbClr val="FEF2F2"/>
+          </a:solidFill>
+          <a:ln w="19050">
+            <a:solidFill>
+              <a:srgbClr val="991B1B"/>
+            </a:solidFill>
+          </a:ln>
+          <a:effectLst/>
+        </p:spPr>
+        <p:style>
+          <a:lnRef idx="1">
+            <a:schemeClr val="accent1"/>
+          </a:lnRef>
+          <a:fillRef idx="3">
+            <a:schemeClr val="accent1"/>
+          </a:fillRef>
+          <a:effectRef idx="2">
+            <a:schemeClr val="accent1"/>
+          </a:effectRef>
+          <a:fontRef idx="minor">
+            <a:schemeClr val="lt1"/>
+          </a:fontRef>
+        </p:style>
+        <p:txBody>
+          <a:bodyPr rtlCol="0" anchor="ctr"/>
+          <a:lstStyle/>
+          <a:p>
+            <a:pPr algn="ctr"/>
+          </a:p>
+        </p:txBody>
+      </p:sp>
+      <p:sp>
+        <p:nvSpPr>
+          <p:cNvPr id="8" name="TextBox 7"/>
+          <p:cNvSpPr txBox="1"/>
+          <p:nvPr/>
+        </p:nvSpPr>
+        <p:spPr>
+          <a:xfrm>
+            <a:off x="914400" y="4480560"/>
+            <a:ext cx="8321040" cy="685800"/>
+          </a:xfrm>
+          <a:prstGeom prst="rect">
+            <a:avLst/>
+          </a:prstGeom>
+          <a:noFill/>
+        </p:spPr>
+        <p:txBody>
+          <a:bodyPr wrap="square" anchor="ctr">
+            <a:spAutoFit/>
+          </a:bodyPr>
+          <a:lstStyle/>
+          <a:p>
+            <a:pPr algn="l">
+              <a:spcAft>
+                <a:spcPts val="400"/>
+              </a:spcAft>
+            </a:pPr>
+            <a:r>
+              <a:rPr sz="2400" b="1">
+                <a:solidFill>
+                  <a:srgbClr val="991B1B"/>
+                </a:solidFill>
+                <a:latin typeface="Calibri"/>
+              </a:rPr>
+              <a:t>Chỉ câu a) là mệnh đề</a:t>
+            </a:r>
+          </a:p>
+        </p:txBody>
+      </p:sp>
+      <p:sp>
+        <p:nvSpPr>
+          <p:cNvPr id="9" name="Rounded Rectangle 8"/>
+          <p:cNvSpPr/>
+          <p:nvPr/>
+        </p:nvSpPr>
+        <p:spPr>
+          <a:xfrm>
+            <a:off x="10463479" y="457200"/>
+            <a:ext cx="1179576" cy="457200"/>
+          </a:xfrm>
+          <a:prstGeom prst="roundRect">
+            <a:avLst/>
+          </a:prstGeom>
+          <a:solidFill>
+            <a:srgbClr val="166534"/>
+          </a:solidFill>
+          <a:ln>
+            <a:noFill/>
+          </a:ln>
+          <a:effectLst/>
+        </p:spPr>
+        <p:style>
+          <a:lnRef idx="1">
+            <a:schemeClr val="accent1"/>
+          </a:lnRef>
+          <a:fillRef idx="3">
+            <a:schemeClr val="accent1"/>
+          </a:fillRef>
+          <a:effectRef idx="2">
+            <a:schemeClr val="accent1"/>
+          </a:effectRef>
+          <a:fontRef idx="minor">
+            <a:schemeClr val="lt1"/>
+          </a:fontRef>
+        </p:style>
+        <p:txBody>
+          <a:bodyPr rtlCol="0" anchor="ctr" tIns="0" bIns="0"/>
+          <a:lstStyle/>
+          <a:p>
+            <a:pPr algn="ctr"/>
+            <a:r>
+              <a:rPr sz="1400" b="1">
+                <a:solidFill>
+                  <a:srgbClr val="FFFFFF"/>
+                </a:solidFill>
+                <a:latin typeface="Arial"/>
+              </a:rPr>
+              <a:t>LỜI GIẢI</a:t>
+            </a:r>
+          </a:p>
+        </p:txBody>
+      </p:sp>
+    </p:spTree>
+  </p:cSld>
+  <p:clrMapOvr>
+    <a:masterClrMapping/>
+  </p:clrMapOvr>
+</p:sld>
+</file>
+
+<file path=ppt/slides/slide19.xml><?xml version="1.0" encoding="utf-8"?>
+<p:sld xmlns:a="http://schemas.openxmlformats.org/drawingml/2006/main" xmlns:p="http://schemas.openxmlformats.org/presentationml/2006/main" xmlns:r="http://schemas.openxmlformats.org/officeDocument/2006/relationships">
+  <p:cSld>
+    <p:bg>
+      <p:bgPr>
+        <a:solidFill>
+          <a:srgbClr val="FFFFFF"/>
+        </a:solidFill>
+        <a:effectLst/>
+      </p:bgPr>
+    </p:bg>
+    <p:spTree>
+      <p:nvGrpSpPr>
+        <p:cNvPr id="1" name=""/>
+        <p:cNvGrpSpPr/>
+        <p:nvPr/>
+      </p:nvGrpSpPr>
+      <p:grpSpPr/>
+      <p:sp>
+        <p:nvSpPr>
+          <p:cNvPr id="2" name="Rectangle 1"/>
+          <p:cNvSpPr/>
+          <p:nvPr/>
+        </p:nvSpPr>
+        <p:spPr>
+          <a:xfrm>
+            <a:off x="457200" y="384048"/>
+            <a:ext cx="109728" cy="658368"/>
+          </a:xfrm>
+          <a:prstGeom prst="rect">
+            <a:avLst/>
+          </a:prstGeom>
+          <a:solidFill>
+            <a:srgbClr val="1E40AF"/>
+          </a:solidFill>
+          <a:ln>
+            <a:noFill/>
+          </a:ln>
+          <a:effectLst/>
+        </p:spPr>
+        <p:style>
+          <a:lnRef idx="1">
+            <a:schemeClr val="accent1"/>
+          </a:lnRef>
+          <a:fillRef idx="3">
+            <a:schemeClr val="accent1"/>
+          </a:fillRef>
+          <a:effectRef idx="2">
+            <a:schemeClr val="accent1"/>
+          </a:effectRef>
+          <a:fontRef idx="minor">
+            <a:schemeClr val="lt1"/>
+          </a:fontRef>
+        </p:style>
+        <p:txBody>
+          <a:bodyPr rtlCol="0" anchor="ctr"/>
+          <a:lstStyle/>
+          <a:p>
+            <a:pPr algn="ctr"/>
+          </a:p>
+        </p:txBody>
+      </p:sp>
+      <p:sp>
+        <p:nvSpPr>
+          <p:cNvPr id="3" name="TextBox 2"/>
+          <p:cNvSpPr txBox="1"/>
+          <p:nvPr/>
+        </p:nvSpPr>
+        <p:spPr>
+          <a:xfrm>
+            <a:off x="731520" y="274320"/>
+            <a:ext cx="9848088" cy="868680"/>
           </a:xfrm>
           <a:prstGeom prst="rect">
             <a:avLst/>
@@ -6114,44 +7706,18 @@
           </p:sp>
         </mc:Fallback>
       </mc:AlternateContent>
-    </p:spTree>
-  </p:cSld>
-  <p:clrMapOvr>
-    <a:masterClrMapping/>
-  </p:clrMapOvr>
-</p:sld>
-</file>
-
-<file path=ppt/slides/slide17.xml><?xml version="1.0" encoding="utf-8"?>
-<p:sld xmlns:a="http://schemas.openxmlformats.org/drawingml/2006/main" xmlns:p="http://schemas.openxmlformats.org/presentationml/2006/main" xmlns:r="http://schemas.openxmlformats.org/officeDocument/2006/relationships">
-  <p:cSld>
-    <p:bg>
-      <p:bgPr>
-        <a:solidFill>
-          <a:srgbClr val="FFFFFF"/>
-        </a:solidFill>
-        <a:effectLst/>
-      </p:bgPr>
-    </p:bg>
-    <p:spTree>
-      <p:nvGrpSpPr>
-        <p:cNvPr id="1" name=""/>
-        <p:cNvGrpSpPr/>
-        <p:nvPr/>
-      </p:nvGrpSpPr>
-      <p:grpSpPr/>
-      <p:sp>
-        <p:nvSpPr>
-          <p:cNvPr id="2" name="Rectangle 1"/>
+      <p:sp>
+        <p:nvSpPr>
+          <p:cNvPr id="7" name="Rounded Rectangle 6"/>
           <p:cNvSpPr/>
           <p:nvPr/>
         </p:nvSpPr>
         <p:spPr>
           <a:xfrm>
-            <a:off x="457200" y="384048"/>
-            <a:ext cx="109728" cy="658368"/>
-          </a:xfrm>
-          <a:prstGeom prst="rect">
+            <a:off x="10701223" y="457200"/>
+            <a:ext cx="941832" cy="457200"/>
+          </a:xfrm>
+          <a:prstGeom prst="roundRect">
             <a:avLst/>
           </a:prstGeom>
           <a:solidFill>
@@ -6177,746 +7743,22 @@
           </a:fontRef>
         </p:style>
         <p:txBody>
-          <a:bodyPr rtlCol="0" anchor="ctr"/>
+          <a:bodyPr rtlCol="0" anchor="ctr" tIns="0" bIns="0"/>
           <a:lstStyle/>
           <a:p>
             <a:pPr algn="ctr"/>
-          </a:p>
-        </p:txBody>
-      </p:sp>
-      <p:sp>
-        <p:nvSpPr>
-          <p:cNvPr id="3" name="TextBox 2"/>
-          <p:cNvSpPr txBox="1"/>
-          <p:nvPr/>
-        </p:nvSpPr>
-        <p:spPr>
-          <a:xfrm>
-            <a:off x="731520" y="274320"/>
-            <a:ext cx="10972800" cy="868680"/>
-          </a:xfrm>
-          <a:prstGeom prst="rect">
-            <a:avLst/>
-          </a:prstGeom>
-          <a:noFill/>
-        </p:spPr>
-        <p:txBody>
-          <a:bodyPr wrap="none" anchor="ctr">
-            <a:spAutoFit/>
-          </a:bodyPr>
-          <a:lstStyle/>
-          <a:p>
-            <a:r>
-              <a:rPr sz="3600" b="1">
-                <a:solidFill>
-                  <a:srgbClr val="1E40AF"/>
+            <a:r>
+              <a:rPr sz="1400" b="1">
+                <a:solidFill>
+                  <a:srgbClr val="FFFFFF"/>
                 </a:solidFill>
                 <a:latin typeface="Arial"/>
               </a:rPr>
-              <a:t>TRẠM KIỂM CHỨNG AI</a:t>
-            </a:r>
-          </a:p>
-        </p:txBody>
-      </p:sp>
-      <p:sp>
-        <p:nvSpPr>
-          <p:cNvPr id="4" name="Rectangle 3"/>
-          <p:cNvSpPr/>
-          <p:nvPr/>
-        </p:nvSpPr>
-        <p:spPr>
-          <a:xfrm>
-            <a:off x="457200" y="1207008"/>
-            <a:ext cx="11274552" cy="22000"/>
-          </a:xfrm>
-          <a:prstGeom prst="rect">
-            <a:avLst/>
-          </a:prstGeom>
-          <a:solidFill>
-            <a:srgbClr val="E2E8F0"/>
-          </a:solidFill>
-          <a:ln>
-            <a:noFill/>
-          </a:ln>
-          <a:effectLst/>
-        </p:spPr>
-        <p:style>
-          <a:lnRef idx="1">
-            <a:schemeClr val="accent1"/>
-          </a:lnRef>
-          <a:fillRef idx="3">
-            <a:schemeClr val="accent1"/>
-          </a:fillRef>
-          <a:effectRef idx="2">
-            <a:schemeClr val="accent1"/>
-          </a:effectRef>
-          <a:fontRef idx="minor">
-            <a:schemeClr val="lt1"/>
-          </a:fontRef>
-        </p:style>
-        <p:txBody>
-          <a:bodyPr rtlCol="0" anchor="ctr"/>
-          <a:lstStyle/>
-          <a:p>
-            <a:pPr algn="ctr"/>
-          </a:p>
-        </p:txBody>
-      </p:sp>
-      <p:sp>
-        <p:nvSpPr>
-          <p:cNvPr id="5" name="TextBox 4"/>
-          <p:cNvSpPr txBox="1"/>
-          <p:nvPr/>
-        </p:nvSpPr>
-        <p:spPr>
-          <a:xfrm>
-            <a:off x="457200" y="6355080"/>
-            <a:ext cx="11274552" cy="365760"/>
-          </a:xfrm>
-          <a:prstGeom prst="rect">
-            <a:avLst/>
-          </a:prstGeom>
-          <a:noFill/>
-        </p:spPr>
-        <p:txBody>
-          <a:bodyPr wrap="none">
-            <a:spAutoFit/>
-          </a:bodyPr>
-          <a:lstStyle/>
-          <a:p>
-            <a:pPr algn="r"/>
-            <a:r>
-              <a:rPr sz="1200">
-                <a:solidFill>
-                  <a:srgbClr val="64748B"/>
-                </a:solidFill>
-                <a:latin typeface="Calibri"/>
-              </a:rPr>
-              <a:t>Toán 10 · Bài 1. Mệnh đề          21</a:t>
-            </a:r>
-          </a:p>
-        </p:txBody>
-      </p:sp>
-      <p:sp>
-        <p:nvSpPr>
-          <p:cNvPr id="6" name="TextBox 5"/>
-          <p:cNvSpPr txBox="1"/>
-          <p:nvPr/>
-        </p:nvSpPr>
-        <p:spPr>
-          <a:xfrm>
-            <a:off x="731520" y="1508760"/>
-            <a:ext cx="10789920" cy="1700784"/>
-          </a:xfrm>
-          <a:prstGeom prst="rect">
-            <a:avLst/>
-          </a:prstGeom>
-          <a:noFill/>
-        </p:spPr>
-        <p:txBody>
-          <a:bodyPr wrap="square" anchor="t">
-            <a:spAutoFit/>
-          </a:bodyPr>
-          <a:lstStyle/>
-          <a:p>
-            <a:pPr algn="l" marL="365760" indent="-365760">
-              <a:spcAft>
-                <a:spcPts val="1000"/>
-              </a:spcAft>
-              <a:buClr>
-                <a:srgbClr val="1E40AF"/>
-              </a:buClr>
-              <a:buFont typeface="Arial"/>
-              <a:buChar char="•"/>
-            </a:pPr>
-            <a:r>
-              <a:rPr sz="2400">
-                <a:solidFill>
-                  <a:srgbClr val="1E293B"/>
-                </a:solidFill>
-                <a:latin typeface="Calibri"/>
-              </a:rPr>
-              <a:t>Chatbot AI trả lời câu hỏi về mệnh đề</a:t>
-            </a:r>
-          </a:p>
-          <a:p>
-            <a:pPr algn="l" marL="365760" indent="-365760">
-              <a:spcAft>
-                <a:spcPts val="1000"/>
-              </a:spcAft>
-              <a:buClr>
-                <a:srgbClr val="1E40AF"/>
-              </a:buClr>
-              <a:buFont typeface="Arial"/>
-              <a:buChar char="•"/>
-            </a:pPr>
-            <a:r>
-              <a:rPr sz="2400">
-                <a:solidFill>
-                  <a:srgbClr val="1E293B"/>
-                </a:solidFill>
-                <a:latin typeface="Calibri"/>
-              </a:rPr>
-              <a:t>Nhóm đọc Phiếu Trạm kiểm chứng AI</a:t>
-            </a:r>
-          </a:p>
-          <a:p>
-            <a:pPr algn="l">
-              <a:spcAft>
-                <a:spcPts val="1000"/>
-              </a:spcAft>
-            </a:pPr>
-            <a:r>
-              <a:rPr sz="2400" b="1">
-                <a:solidFill>
-                  <a:srgbClr val="1E40AF"/>
-                </a:solidFill>
-                <a:latin typeface="Calibri"/>
-              </a:rPr>
-              <a:t>Gợi mở: Tìm bước sai, giải thích, sửa lại</a:t>
-            </a:r>
-          </a:p>
-        </p:txBody>
-      </p:sp>
-    </p:spTree>
-  </p:cSld>
-  <p:clrMapOvr>
-    <a:masterClrMapping/>
-  </p:clrMapOvr>
-</p:sld>
-</file>
-
-<file path=ppt/slides/slide18.xml><?xml version="1.0" encoding="utf-8"?>
-<p:sld xmlns:a="http://schemas.openxmlformats.org/drawingml/2006/main" xmlns:p="http://schemas.openxmlformats.org/presentationml/2006/main" xmlns:r="http://schemas.openxmlformats.org/officeDocument/2006/relationships">
-  <p:cSld>
-    <p:bg>
-      <p:bgPr>
-        <a:solidFill>
-          <a:srgbClr val="FFFFFF"/>
-        </a:solidFill>
-        <a:effectLst/>
-      </p:bgPr>
-    </p:bg>
-    <p:spTree>
-      <p:nvGrpSpPr>
-        <p:cNvPr id="1" name=""/>
-        <p:cNvGrpSpPr/>
-        <p:nvPr/>
-      </p:nvGrpSpPr>
-      <p:grpSpPr/>
-      <p:sp>
-        <p:nvSpPr>
-          <p:cNvPr id="2" name="Rectangle 1"/>
-          <p:cNvSpPr/>
-          <p:nvPr/>
-        </p:nvSpPr>
-        <p:spPr>
-          <a:xfrm>
-            <a:off x="457200" y="384048"/>
-            <a:ext cx="109728" cy="658368"/>
-          </a:xfrm>
-          <a:prstGeom prst="rect">
-            <a:avLst/>
-          </a:prstGeom>
-          <a:solidFill>
-            <a:srgbClr val="1E40AF"/>
-          </a:solidFill>
-          <a:ln>
-            <a:noFill/>
-          </a:ln>
-          <a:effectLst/>
-        </p:spPr>
-        <p:style>
-          <a:lnRef idx="1">
-            <a:schemeClr val="accent1"/>
-          </a:lnRef>
-          <a:fillRef idx="3">
-            <a:schemeClr val="accent1"/>
-          </a:fillRef>
-          <a:effectRef idx="2">
-            <a:schemeClr val="accent1"/>
-          </a:effectRef>
-          <a:fontRef idx="minor">
-            <a:schemeClr val="lt1"/>
-          </a:fontRef>
-        </p:style>
-        <p:txBody>
-          <a:bodyPr rtlCol="0" anchor="ctr"/>
-          <a:lstStyle/>
-          <a:p>
-            <a:pPr algn="ctr"/>
-          </a:p>
-        </p:txBody>
-      </p:sp>
-      <p:sp>
-        <p:nvSpPr>
-          <p:cNvPr id="3" name="TextBox 2"/>
-          <p:cNvSpPr txBox="1"/>
-          <p:nvPr/>
-        </p:nvSpPr>
-        <p:spPr>
-          <a:xfrm>
-            <a:off x="731520" y="274320"/>
-            <a:ext cx="10972800" cy="868680"/>
-          </a:xfrm>
-          <a:prstGeom prst="rect">
-            <a:avLst/>
-          </a:prstGeom>
-          <a:noFill/>
-        </p:spPr>
-        <p:txBody>
-          <a:bodyPr wrap="none" anchor="ctr">
-            <a:spAutoFit/>
-          </a:bodyPr>
-          <a:lstStyle/>
-          <a:p>
-            <a:r>
-              <a:rPr sz="3600" b="1">
-                <a:solidFill>
-                  <a:srgbClr val="1E40AF"/>
-                </a:solidFill>
-                <a:latin typeface="Arial"/>
-              </a:rPr>
-              <a:t>NHIỆM VỤ VỀ NHÀ: THÁM TỬ MỆNH ĐỀ</a:t>
-            </a:r>
-          </a:p>
-        </p:txBody>
-      </p:sp>
-      <p:sp>
-        <p:nvSpPr>
-          <p:cNvPr id="4" name="Rectangle 3"/>
-          <p:cNvSpPr/>
-          <p:nvPr/>
-        </p:nvSpPr>
-        <p:spPr>
-          <a:xfrm>
-            <a:off x="457200" y="1207008"/>
-            <a:ext cx="11274552" cy="22000"/>
-          </a:xfrm>
-          <a:prstGeom prst="rect">
-            <a:avLst/>
-          </a:prstGeom>
-          <a:solidFill>
-            <a:srgbClr val="E2E8F0"/>
-          </a:solidFill>
-          <a:ln>
-            <a:noFill/>
-          </a:ln>
-          <a:effectLst/>
-        </p:spPr>
-        <p:style>
-          <a:lnRef idx="1">
-            <a:schemeClr val="accent1"/>
-          </a:lnRef>
-          <a:fillRef idx="3">
-            <a:schemeClr val="accent1"/>
-          </a:fillRef>
-          <a:effectRef idx="2">
-            <a:schemeClr val="accent1"/>
-          </a:effectRef>
-          <a:fontRef idx="minor">
-            <a:schemeClr val="lt1"/>
-          </a:fontRef>
-        </p:style>
-        <p:txBody>
-          <a:bodyPr rtlCol="0" anchor="ctr"/>
-          <a:lstStyle/>
-          <a:p>
-            <a:pPr algn="ctr"/>
-          </a:p>
-        </p:txBody>
-      </p:sp>
-      <p:sp>
-        <p:nvSpPr>
-          <p:cNvPr id="5" name="TextBox 4"/>
-          <p:cNvSpPr txBox="1"/>
-          <p:nvPr/>
-        </p:nvSpPr>
-        <p:spPr>
-          <a:xfrm>
-            <a:off x="457200" y="6355080"/>
-            <a:ext cx="11274552" cy="365760"/>
-          </a:xfrm>
-          <a:prstGeom prst="rect">
-            <a:avLst/>
-          </a:prstGeom>
-          <a:noFill/>
-        </p:spPr>
-        <p:txBody>
-          <a:bodyPr wrap="none">
-            <a:spAutoFit/>
-          </a:bodyPr>
-          <a:lstStyle/>
-          <a:p>
-            <a:pPr algn="r"/>
-            <a:r>
-              <a:rPr sz="1200">
-                <a:solidFill>
-                  <a:srgbClr val="64748B"/>
-                </a:solidFill>
-                <a:latin typeface="Calibri"/>
-              </a:rPr>
-              <a:t>Toán 10 · Bài 1. Mệnh đề          23</a:t>
-            </a:r>
-          </a:p>
-        </p:txBody>
-      </p:sp>
-      <p:sp>
-        <p:nvSpPr>
-          <p:cNvPr id="6" name="TextBox 5"/>
-          <p:cNvSpPr txBox="1"/>
-          <p:nvPr/>
-        </p:nvSpPr>
-        <p:spPr>
-          <a:xfrm>
-            <a:off x="731520" y="1508760"/>
-            <a:ext cx="10789920" cy="3401568"/>
-          </a:xfrm>
-          <a:prstGeom prst="rect">
-            <a:avLst/>
-          </a:prstGeom>
-          <a:noFill/>
-        </p:spPr>
-        <p:txBody>
-          <a:bodyPr wrap="square" anchor="t">
-            <a:spAutoFit/>
-          </a:bodyPr>
-          <a:lstStyle/>
-          <a:p>
-            <a:pPr algn="l" marL="365760" indent="-365760">
-              <a:spcAft>
-                <a:spcPts val="1000"/>
-              </a:spcAft>
-              <a:buClr>
-                <a:srgbClr val="1E40AF"/>
-              </a:buClr>
-              <a:buFont typeface="Arial"/>
-              <a:buChar char="•"/>
-            </a:pPr>
-            <a:r>
-              <a:rPr sz="2400">
-                <a:solidFill>
-                  <a:srgbClr val="1E293B"/>
-                </a:solidFill>
-                <a:latin typeface="Calibri"/>
-              </a:rPr>
-              <a:t>Sưu tầm 3 phát biểu trên mạng</a:t>
-            </a:r>
-          </a:p>
-          <a:p>
-            <a:pPr algn="l" marL="365760" indent="-365760">
-              <a:spcAft>
-                <a:spcPts val="1000"/>
-              </a:spcAft>
-              <a:buClr>
-                <a:srgbClr val="1E40AF"/>
-              </a:buClr>
-              <a:buFont typeface="Arial"/>
-              <a:buChar char="•"/>
-            </a:pPr>
-            <a:r>
-              <a:rPr sz="2400">
-                <a:solidFill>
-                  <a:srgbClr val="1E293B"/>
-                </a:solidFill>
-                <a:latin typeface="Calibri"/>
-              </a:rPr>
-              <a:t>Có dạng “nếu … thì”, “mọi”, “có”</a:t>
-            </a:r>
-          </a:p>
-          <a:p>
-            <a:pPr algn="l" marL="365760" indent="-365760">
-              <a:spcAft>
-                <a:spcPts val="1000"/>
-              </a:spcAft>
-              <a:buClr>
-                <a:srgbClr val="1E40AF"/>
-              </a:buClr>
-              <a:buFont typeface="Arial"/>
-              <a:buChar char="•"/>
-            </a:pPr>
-            <a:r>
-              <a:rPr sz="2400">
-                <a:solidFill>
-                  <a:srgbClr val="1E293B"/>
-                </a:solidFill>
-                <a:latin typeface="Calibri"/>
-              </a:rPr>
-              <a:t>Viết lại bằng ⇒, ∀, ∃</a:t>
-            </a:r>
-          </a:p>
-          <a:p>
-            <a:pPr algn="l" marL="365760" indent="-365760">
-              <a:spcAft>
-                <a:spcPts val="1000"/>
-              </a:spcAft>
-              <a:buClr>
-                <a:srgbClr val="1E40AF"/>
-              </a:buClr>
-              <a:buFont typeface="Arial"/>
-              <a:buChar char="•"/>
-            </a:pPr>
-            <a:r>
-              <a:rPr sz="2400">
-                <a:solidFill>
-                  <a:srgbClr val="1E293B"/>
-                </a:solidFill>
-                <a:latin typeface="Calibri"/>
-              </a:rPr>
-              <a:t>Lập phủ định, kết luận đúng/sai</a:t>
-            </a:r>
-          </a:p>
-          <a:p>
-            <a:pPr algn="l" marL="365760" indent="-365760">
-              <a:spcAft>
-                <a:spcPts val="1000"/>
-              </a:spcAft>
-              <a:buClr>
-                <a:srgbClr val="1E40AF"/>
-              </a:buClr>
-              <a:buFont typeface="Arial"/>
-              <a:buChar char="•"/>
-            </a:pPr>
-            <a:r>
-              <a:rPr sz="2400">
-                <a:solidFill>
-                  <a:srgbClr val="1E293B"/>
-                </a:solidFill>
-                <a:latin typeface="Calibri"/>
-              </a:rPr>
-              <a:t>Làm poster hoặc 3–5 slide</a:t>
-            </a:r>
-          </a:p>
-          <a:p>
-            <a:pPr algn="l" marL="365760" indent="-365760">
-              <a:spcAft>
-                <a:spcPts val="1000"/>
-              </a:spcAft>
-              <a:buClr>
-                <a:srgbClr val="1E40AF"/>
-              </a:buClr>
-              <a:buFont typeface="Arial"/>
-              <a:buChar char="•"/>
-            </a:pPr>
-            <a:r>
-              <a:rPr sz="2400">
-                <a:solidFill>
-                  <a:srgbClr val="1E293B"/>
-                </a:solidFill>
-                <a:latin typeface="Calibri"/>
-              </a:rPr>
-              <a:t>Nộp Padlet kèm Nhật ký AI</a:t>
-            </a:r>
-          </a:p>
-        </p:txBody>
-      </p:sp>
-    </p:spTree>
-  </p:cSld>
-  <p:clrMapOvr>
-    <a:masterClrMapping/>
-  </p:clrMapOvr>
-</p:sld>
-</file>
-
-<file path=ppt/slides/slide19.xml><?xml version="1.0" encoding="utf-8"?>
-<p:sld xmlns:a="http://schemas.openxmlformats.org/drawingml/2006/main" xmlns:p="http://schemas.openxmlformats.org/presentationml/2006/main" xmlns:r="http://schemas.openxmlformats.org/officeDocument/2006/relationships">
-  <p:cSld>
-    <p:bg>
-      <p:bgPr>
-        <a:solidFill>
-          <a:srgbClr val="FFFFFF"/>
-        </a:solidFill>
-        <a:effectLst/>
-      </p:bgPr>
-    </p:bg>
-    <p:spTree>
-      <p:nvGrpSpPr>
-        <p:cNvPr id="1" name=""/>
-        <p:cNvGrpSpPr/>
-        <p:nvPr/>
-      </p:nvGrpSpPr>
-      <p:grpSpPr/>
-      <p:sp>
-        <p:nvSpPr>
-          <p:cNvPr id="2" name="Rectangle 1"/>
-          <p:cNvSpPr/>
-          <p:nvPr/>
-        </p:nvSpPr>
-        <p:spPr>
-          <a:xfrm>
-            <a:off x="457200" y="384048"/>
-            <a:ext cx="109728" cy="658368"/>
-          </a:xfrm>
-          <a:prstGeom prst="rect">
-            <a:avLst/>
-          </a:prstGeom>
-          <a:solidFill>
-            <a:srgbClr val="1E40AF"/>
-          </a:solidFill>
-          <a:ln>
-            <a:noFill/>
-          </a:ln>
-          <a:effectLst/>
-        </p:spPr>
-        <p:style>
-          <a:lnRef idx="1">
-            <a:schemeClr val="accent1"/>
-          </a:lnRef>
-          <a:fillRef idx="3">
-            <a:schemeClr val="accent1"/>
-          </a:fillRef>
-          <a:effectRef idx="2">
-            <a:schemeClr val="accent1"/>
-          </a:effectRef>
-          <a:fontRef idx="minor">
-            <a:schemeClr val="lt1"/>
-          </a:fontRef>
-        </p:style>
-        <p:txBody>
-          <a:bodyPr rtlCol="0" anchor="ctr"/>
-          <a:lstStyle/>
-          <a:p>
-            <a:pPr algn="ctr"/>
-          </a:p>
-        </p:txBody>
-      </p:sp>
-      <p:sp>
-        <p:nvSpPr>
-          <p:cNvPr id="3" name="TextBox 2"/>
-          <p:cNvSpPr txBox="1"/>
-          <p:nvPr/>
-        </p:nvSpPr>
-        <p:spPr>
-          <a:xfrm>
-            <a:off x="731520" y="274320"/>
-            <a:ext cx="10972800" cy="868680"/>
-          </a:xfrm>
-          <a:prstGeom prst="rect">
-            <a:avLst/>
-          </a:prstGeom>
-          <a:noFill/>
-        </p:spPr>
-        <p:txBody>
-          <a:bodyPr wrap="none" anchor="ctr">
-            <a:spAutoFit/>
-          </a:bodyPr>
-          <a:lstStyle/>
-          <a:p>
-            <a:r>
-              <a:rPr sz="3600" b="1">
-                <a:solidFill>
-                  <a:srgbClr val="1E40AF"/>
-                </a:solidFill>
-                <a:latin typeface="Arial"/>
-              </a:rPr>
-              <a:t>SƠ ĐỒ TƯ DUY BÀI HỌC</a:t>
-            </a:r>
-          </a:p>
-        </p:txBody>
-      </p:sp>
-      <p:sp>
-        <p:nvSpPr>
-          <p:cNvPr id="4" name="Rectangle 3"/>
-          <p:cNvSpPr/>
-          <p:nvPr/>
-        </p:nvSpPr>
-        <p:spPr>
-          <a:xfrm>
-            <a:off x="457200" y="1207008"/>
-            <a:ext cx="11274552" cy="22000"/>
-          </a:xfrm>
-          <a:prstGeom prst="rect">
-            <a:avLst/>
-          </a:prstGeom>
-          <a:solidFill>
-            <a:srgbClr val="E2E8F0"/>
-          </a:solidFill>
-          <a:ln>
-            <a:noFill/>
-          </a:ln>
-          <a:effectLst/>
-        </p:spPr>
-        <p:style>
-          <a:lnRef idx="1">
-            <a:schemeClr val="accent1"/>
-          </a:lnRef>
-          <a:fillRef idx="3">
-            <a:schemeClr val="accent1"/>
-          </a:fillRef>
-          <a:effectRef idx="2">
-            <a:schemeClr val="accent1"/>
-          </a:effectRef>
-          <a:fontRef idx="minor">
-            <a:schemeClr val="lt1"/>
-          </a:fontRef>
-        </p:style>
-        <p:txBody>
-          <a:bodyPr rtlCol="0" anchor="ctr"/>
-          <a:lstStyle/>
-          <a:p>
-            <a:pPr algn="ctr"/>
-          </a:p>
-        </p:txBody>
-      </p:sp>
-      <p:sp>
-        <p:nvSpPr>
-          <p:cNvPr id="5" name="TextBox 4"/>
-          <p:cNvSpPr txBox="1"/>
-          <p:nvPr/>
-        </p:nvSpPr>
-        <p:spPr>
-          <a:xfrm>
-            <a:off x="457200" y="6355080"/>
-            <a:ext cx="11274552" cy="365760"/>
-          </a:xfrm>
-          <a:prstGeom prst="rect">
-            <a:avLst/>
-          </a:prstGeom>
-          <a:noFill/>
-        </p:spPr>
-        <p:txBody>
-          <a:bodyPr wrap="none">
-            <a:spAutoFit/>
-          </a:bodyPr>
-          <a:lstStyle/>
-          <a:p>
-            <a:pPr algn="r"/>
-            <a:r>
-              <a:rPr sz="1200">
-                <a:solidFill>
-                  <a:srgbClr val="64748B"/>
-                </a:solidFill>
-                <a:latin typeface="Calibri"/>
-              </a:rPr>
-              <a:t>Toán 10 · Bài 1. Mệnh đề          24</a:t>
-            </a:r>
-          </a:p>
-        </p:txBody>
-      </p:sp>
-      <p:pic>
-        <p:nvPicPr>
-          <p:cNvPr id="6" name="Picture 5" descr="rId15.png"/>
-          <p:cNvPicPr>
-            <a:picLocks noChangeAspect="1"/>
-          </p:cNvPicPr>
-          <p:nvPr/>
-        </p:nvPicPr>
-        <p:blipFill>
-          <a:blip r:embed="rId2"/>
-          <a:stretch>
-            <a:fillRect/>
-          </a:stretch>
-        </p:blipFill>
-        <p:spPr>
-          <a:xfrm>
-            <a:off x="2452400" y="1417320"/>
-            <a:ext cx="7256720" cy="4800600"/>
-          </a:xfrm>
-          <a:prstGeom prst="rect">
-            <a:avLst/>
-          </a:prstGeom>
-        </p:spPr>
-      </p:pic>
+              <a:t>ĐỀ BÀI</a:t>
+            </a:r>
+          </a:p>
+        </p:txBody>
+      </p:sp>
     </p:spTree>
   </p:cSld>
   <p:clrMapOvr>
@@ -7328,7 +8170,7 @@
         <p:spPr>
           <a:xfrm>
             <a:off x="731520" y="274320"/>
-            <a:ext cx="10972800" cy="868680"/>
+            <a:ext cx="9610344" cy="868680"/>
           </a:xfrm>
           <a:prstGeom prst="rect">
             <a:avLst/>
@@ -7348,7 +8190,7 @@
                 </a:solidFill>
                 <a:latin typeface="Arial"/>
               </a:rPr>
-              <a:t>BÀI TẬP CỦA BẠN</a:t>
+              <a:t>LUYỆN TẬP 1.2</a:t>
             </a:r>
           </a:p>
         </p:txBody>
@@ -7427,91 +8269,21 @@
                 </a:solidFill>
                 <a:latin typeface="Calibri"/>
               </a:rPr>
-              <a:t>Toán 10 · Bài 1. Mệnh đề          25</a:t>
-            </a:r>
-          </a:p>
-        </p:txBody>
-      </p:sp>
-      <p:sp>
-        <p:nvSpPr>
-          <p:cNvPr id="6" name="Rectangle 5"/>
-          <p:cNvSpPr/>
-          <p:nvPr/>
-        </p:nvSpPr>
-        <p:spPr>
-          <a:xfrm>
-            <a:off x="731520" y="1463040"/>
-            <a:ext cx="4572000" cy="4572000"/>
-          </a:xfrm>
-          <a:prstGeom prst="rect">
-            <a:avLst/>
-          </a:prstGeom>
-          <a:solidFill>
-            <a:srgbClr val="F8FAFC"/>
-          </a:solidFill>
-          <a:ln w="19050">
-            <a:solidFill>
-              <a:srgbClr val="E2E8F0"/>
-            </a:solidFill>
-          </a:ln>
-          <a:effectLst/>
-        </p:spPr>
-        <p:style>
-          <a:lnRef idx="1">
-            <a:schemeClr val="accent1"/>
-          </a:lnRef>
-          <a:fillRef idx="3">
-            <a:schemeClr val="accent1"/>
-          </a:fillRef>
-          <a:effectRef idx="2">
-            <a:schemeClr val="accent1"/>
-          </a:effectRef>
-          <a:fontRef idx="minor">
-            <a:schemeClr val="lt1"/>
-          </a:fontRef>
-        </p:style>
-        <p:txBody>
-          <a:bodyPr rtlCol="0" anchor="ctr"/>
-          <a:lstStyle/>
-          <a:p>
-            <a:pPr algn="ctr"/>
-          </a:p>
-        </p:txBody>
-      </p:sp>
-      <p:pic>
-        <p:nvPicPr>
-          <p:cNvPr id="7" name="Picture 6" descr="QR_CungCo_Bai1_Toan10.png"/>
-          <p:cNvPicPr>
-            <a:picLocks noChangeAspect="1"/>
-          </p:cNvPicPr>
-          <p:nvPr/>
-        </p:nvPicPr>
-        <p:blipFill>
-          <a:blip r:embed="rId2"/>
-          <a:stretch>
-            <a:fillRect/>
-          </a:stretch>
-        </p:blipFill>
-        <p:spPr>
-          <a:xfrm>
-            <a:off x="960120" y="1691640"/>
-            <a:ext cx="4114800" cy="4114800"/>
-          </a:xfrm>
-          <a:prstGeom prst="rect">
-            <a:avLst/>
-          </a:prstGeom>
-        </p:spPr>
-      </p:pic>
-      <p:sp>
-        <p:nvSpPr>
-          <p:cNvPr id="8" name="TextBox 7"/>
+              <a:t>Toán 10 · Bài 1. Mệnh đề          20</a:t>
+            </a:r>
+          </a:p>
+        </p:txBody>
+      </p:sp>
+      <p:sp>
+        <p:nvSpPr>
+          <p:cNvPr id="6" name="TextBox 5"/>
           <p:cNvSpPr txBox="1"/>
           <p:nvPr/>
         </p:nvSpPr>
         <p:spPr>
           <a:xfrm>
-            <a:off x="5760720" y="1554480"/>
-            <a:ext cx="6035040" cy="3108960"/>
+            <a:off x="731520" y="1508760"/>
+            <a:ext cx="10789920" cy="2834640"/>
           </a:xfrm>
           <a:prstGeom prst="rect">
             <a:avLst/>
@@ -7523,6 +8295,22 @@
             <a:spAutoFit/>
           </a:bodyPr>
           <a:lstStyle/>
+          <a:p>
+            <a:pPr algn="l">
+              <a:spcAft>
+                <a:spcPts val="1000"/>
+              </a:spcAft>
+            </a:pPr>
+            <a:r>
+              <a:rPr sz="2400" b="1">
+                <a:solidFill>
+                  <a:srgbClr val="1E40AF"/>
+                </a:solidFill>
+                <a:latin typeface="Calibri"/>
+              </a:rPr>
+              <a:t>Xét tính đúng sai</a:t>
+            </a:r>
+          </a:p>
           <a:p>
             <a:pPr algn="l" marL="365760" indent="-365760">
               <a:spcAft>
@@ -7535,13 +8323,13 @@
               <a:buChar char="•"/>
             </a:pPr>
             <a:r>
-              <a:rPr sz="2600">
+              <a:rPr sz="2400">
                 <a:solidFill>
                   <a:srgbClr val="1E293B"/>
                 </a:solidFill>
                 <a:latin typeface="Calibri"/>
               </a:rPr>
-              <a:t>Quét mã QR bằng điện thoại</a:t>
+              <a:t>a) π &gt; 10/3  →  Sai</a:t>
             </a:r>
           </a:p>
           <a:p>
@@ -7556,13 +8344,13 @@
               <a:buChar char="•"/>
             </a:pPr>
             <a:r>
-              <a:rPr sz="2600">
+              <a:rPr sz="2400">
                 <a:solidFill>
                   <a:srgbClr val="1E293B"/>
                 </a:solidFill>
                 <a:latin typeface="Calibri"/>
               </a:rPr>
-              <a:t>Nhập họ tên và lớp</a:t>
+              <a:t>b) 3x + 7 = 0 có nghiệm  →  Đúng</a:t>
             </a:r>
           </a:p>
           <a:p>
@@ -7577,13 +8365,13 @@
               <a:buChar char="•"/>
             </a:pPr>
             <a:r>
-              <a:rPr sz="2600">
+              <a:rPr sz="2400">
                 <a:solidFill>
                   <a:srgbClr val="1E293B"/>
                 </a:solidFill>
                 <a:latin typeface="Calibri"/>
               </a:rPr>
-              <a:t>7 câu – làm trong 7 phút</a:t>
+              <a:t>c) ∃ số a: a + a = 0  →  Đúng</a:t>
             </a:r>
           </a:p>
           <a:p>
@@ -7598,27 +8386,75 @@
               <a:buChar char="•"/>
             </a:pPr>
             <a:r>
-              <a:rPr sz="2600">
+              <a:rPr sz="2400">
                 <a:solidFill>
                   <a:srgbClr val="1E293B"/>
                 </a:solidFill>
                 <a:latin typeface="Calibri"/>
               </a:rPr>
-              <a:t>Nộp bài, xem lời giải</a:t>
-            </a:r>
-          </a:p>
-        </p:txBody>
-      </p:sp>
-      <p:sp>
-        <p:nvSpPr>
-          <p:cNvPr id="9" name="TextBox 8"/>
+              <a:t>d) 2022 là hợp số  →  Đúng</a:t>
+            </a:r>
+          </a:p>
+        </p:txBody>
+      </p:sp>
+      <p:sp>
+        <p:nvSpPr>
+          <p:cNvPr id="7" name="Rounded Rectangle 6"/>
+          <p:cNvSpPr/>
+          <p:nvPr/>
+        </p:nvSpPr>
+        <p:spPr>
+          <a:xfrm>
+            <a:off x="731520" y="4480560"/>
+            <a:ext cx="8686800" cy="685800"/>
+          </a:xfrm>
+          <a:prstGeom prst="roundRect">
+            <a:avLst>
+              <a:gd name="adj" fmla="val 8000"/>
+            </a:avLst>
+          </a:prstGeom>
+          <a:solidFill>
+            <a:srgbClr val="FEF2F2"/>
+          </a:solidFill>
+          <a:ln w="19050">
+            <a:solidFill>
+              <a:srgbClr val="991B1B"/>
+            </a:solidFill>
+          </a:ln>
+          <a:effectLst/>
+        </p:spPr>
+        <p:style>
+          <a:lnRef idx="1">
+            <a:schemeClr val="accent1"/>
+          </a:lnRef>
+          <a:fillRef idx="3">
+            <a:schemeClr val="accent1"/>
+          </a:fillRef>
+          <a:effectRef idx="2">
+            <a:schemeClr val="accent1"/>
+          </a:effectRef>
+          <a:fontRef idx="minor">
+            <a:schemeClr val="lt1"/>
+          </a:fontRef>
+        </p:style>
+        <p:txBody>
+          <a:bodyPr rtlCol="0" anchor="ctr"/>
+          <a:lstStyle/>
+          <a:p>
+            <a:pPr algn="ctr"/>
+          </a:p>
+        </p:txBody>
+      </p:sp>
+      <p:sp>
+        <p:nvSpPr>
+          <p:cNvPr id="8" name="TextBox 7"/>
           <p:cNvSpPr txBox="1"/>
           <p:nvPr/>
         </p:nvSpPr>
         <p:spPr>
           <a:xfrm>
-            <a:off x="5760720" y="4754880"/>
-            <a:ext cx="6035040" cy="1188720"/>
+            <a:off x="914400" y="4480560"/>
+            <a:ext cx="8321040" cy="685800"/>
           </a:xfrm>
           <a:prstGeom prst="rect">
             <a:avLst/>
@@ -7626,25 +8462,77 @@
           <a:noFill/>
         </p:spPr>
         <p:txBody>
-          <a:bodyPr wrap="square" anchor="t">
+          <a:bodyPr wrap="square" anchor="ctr">
             <a:spAutoFit/>
           </a:bodyPr>
           <a:lstStyle/>
           <a:p>
             <a:pPr algn="l">
               <a:spcAft>
-                <a:spcPts val="1000"/>
+                <a:spcPts val="400"/>
               </a:spcAft>
             </a:pPr>
             <a:r>
-              <a:rPr sz="1800" b="1">
-                <a:solidFill>
-                  <a:srgbClr val="1E40AF"/>
+              <a:rPr sz="2400" b="1">
+                <a:solidFill>
+                  <a:srgbClr val="991B1B"/>
                 </a:solidFill>
                 <a:latin typeface="Calibri"/>
-                <a:hlinkClick r:id="rId3"/>
-              </a:rPr>
-              <a:t>trangtu66.github.io/Taode_thi_online/cc_bai1_t10.html</a:t>
+              </a:rPr>
+              <a:t>π ≈ 3,14 &lt; 3,33 ≈ 10/3</a:t>
+            </a:r>
+          </a:p>
+        </p:txBody>
+      </p:sp>
+      <p:sp>
+        <p:nvSpPr>
+          <p:cNvPr id="9" name="Rounded Rectangle 8"/>
+          <p:cNvSpPr/>
+          <p:nvPr/>
+        </p:nvSpPr>
+        <p:spPr>
+          <a:xfrm>
+            <a:off x="10463479" y="457200"/>
+            <a:ext cx="1179576" cy="457200"/>
+          </a:xfrm>
+          <a:prstGeom prst="roundRect">
+            <a:avLst/>
+          </a:prstGeom>
+          <a:solidFill>
+            <a:srgbClr val="166534"/>
+          </a:solidFill>
+          <a:ln>
+            <a:noFill/>
+          </a:ln>
+          <a:effectLst/>
+        </p:spPr>
+        <p:style>
+          <a:lnRef idx="1">
+            <a:schemeClr val="accent1"/>
+          </a:lnRef>
+          <a:fillRef idx="3">
+            <a:schemeClr val="accent1"/>
+          </a:fillRef>
+          <a:effectRef idx="2">
+            <a:schemeClr val="accent1"/>
+          </a:effectRef>
+          <a:fontRef idx="minor">
+            <a:schemeClr val="lt1"/>
+          </a:fontRef>
+        </p:style>
+        <p:txBody>
+          <a:bodyPr rtlCol="0" anchor="ctr" tIns="0" bIns="0"/>
+          <a:lstStyle/>
+          <a:p>
+            <a:pPr algn="ctr"/>
+            <a:r>
+              <a:rPr sz="1400" b="1">
+                <a:solidFill>
+                  <a:srgbClr val="FFFFFF"/>
+                </a:solidFill>
+                <a:latin typeface="Arial"/>
+              </a:rPr>
+              <a:t>LỜI GIẢI</a:t>
             </a:r>
           </a:p>
         </p:txBody>
@@ -7728,7 +8616,7 @@
         <p:spPr>
           <a:xfrm>
             <a:off x="731520" y="274320"/>
-            <a:ext cx="10972800" cy="868680"/>
+            <a:ext cx="9848088" cy="868680"/>
           </a:xfrm>
           <a:prstGeom prst="rect">
             <a:avLst/>
@@ -7748,7 +8636,7 @@
                 </a:solidFill>
                 <a:latin typeface="Arial"/>
               </a:rPr>
-              <a:t>TRẠM KIỂM CHỨNG AI – LỜI GIẢI</a:t>
+              <a:t>TRẠM KIỂM CHỨNG AI</a:t>
             </a:r>
           </a:p>
         </p:txBody>
@@ -7827,7 +8715,7 @@
                 </a:solidFill>
                 <a:latin typeface="Calibri"/>
               </a:rPr>
-              <a:t>Toán 10 · Bài 1. Mệnh đề          22</a:t>
+              <a:t>Toán 10 · Bài 1. Mệnh đề          21</a:t>
             </a:r>
           </a:p>
         </p:txBody>
@@ -7841,7 +8729,7 @@
         <p:spPr>
           <a:xfrm>
             <a:off x="731520" y="1508760"/>
-            <a:ext cx="10789920" cy="2267712"/>
+            <a:ext cx="10789920" cy="1700784"/>
           </a:xfrm>
           <a:prstGeom prst="rect">
             <a:avLst/>
@@ -7853,22 +8741,6 @@
             <a:spAutoFit/>
           </a:bodyPr>
           <a:lstStyle/>
-          <a:p>
-            <a:pPr algn="l">
-              <a:spcAft>
-                <a:spcPts val="1000"/>
-              </a:spcAft>
-            </a:pPr>
-            <a:r>
-              <a:rPr sz="2400" b="1">
-                <a:solidFill>
-                  <a:srgbClr val="1E40AF"/>
-                </a:solidFill>
-                <a:latin typeface="Calibri"/>
-              </a:rPr>
-              <a:t>Tìm lỗi trong câu trả lời AI</a:t>
-            </a:r>
-          </a:p>
           <a:p>
             <a:pPr algn="l" marL="365760" indent="-365760">
               <a:spcAft>
@@ -7887,7 +8759,7 @@
                 </a:solidFill>
                 <a:latin typeface="Calibri"/>
               </a:rPr>
-              <a:t>Phủ định “mọi” thành “mọi … không”</a:t>
+              <a:t>Chatbot AI trả lời câu hỏi về mệnh đề</a:t>
             </a:r>
           </a:p>
           <a:p>
@@ -7908,28 +8780,23 @@
                 </a:solidFill>
                 <a:latin typeface="Calibri"/>
               </a:rPr>
-              <a:t>Thuận đúng ⇒ đảo cũng đúng</a:t>
-            </a:r>
-          </a:p>
-          <a:p>
-            <a:pPr algn="l" marL="365760" indent="-365760">
+              <a:t>Nhóm đọc Phiếu Trạm kiểm chứng AI</a:t>
+            </a:r>
+          </a:p>
+          <a:p>
+            <a:pPr algn="l">
               <a:spcAft>
                 <a:spcPts val="1000"/>
               </a:spcAft>
-              <a:buClr>
-                <a:srgbClr val="1E40AF"/>
-              </a:buClr>
-              <a:buFont typeface="Arial"/>
-              <a:buChar char="•"/>
             </a:pPr>
             <a:r>
-              <a:rPr sz="2400">
-                <a:solidFill>
-                  <a:srgbClr val="1E293B"/>
+              <a:rPr sz="2400" b="1">
+                <a:solidFill>
+                  <a:srgbClr val="1E40AF"/>
                 </a:solidFill>
                 <a:latin typeface="Calibri"/>
               </a:rPr>
-              <a:t>Đổi chỗ điều kiện cần, đủ</a:t>
+              <a:t>Gợi mở: Tìm bước sai, giải thích, sửa lại</a:t>
             </a:r>
           </a:p>
         </p:txBody>
@@ -7942,21 +8809,17 @@
         </p:nvSpPr>
         <p:spPr>
           <a:xfrm>
-            <a:off x="731520" y="3913632"/>
-            <a:ext cx="8686800" cy="685800"/>
+            <a:off x="10701223" y="457200"/>
+            <a:ext cx="941832" cy="457200"/>
           </a:xfrm>
           <a:prstGeom prst="roundRect">
-            <a:avLst>
-              <a:gd name="adj" fmla="val 8000"/>
-            </a:avLst>
+            <a:avLst/>
           </a:prstGeom>
           <a:solidFill>
-            <a:srgbClr val="FEF2F2"/>
+            <a:srgbClr val="1E40AF"/>
           </a:solidFill>
-          <a:ln w="19050">
-            <a:solidFill>
-              <a:srgbClr val="991B1B"/>
-            </a:solidFill>
+          <a:ln>
+            <a:noFill/>
           </a:ln>
           <a:effectLst/>
         </p:spPr>
@@ -7975,48 +8838,18 @@
           </a:fontRef>
         </p:style>
         <p:txBody>
-          <a:bodyPr rtlCol="0" anchor="ctr"/>
+          <a:bodyPr rtlCol="0" anchor="ctr" tIns="0" bIns="0"/>
           <a:lstStyle/>
           <a:p>
             <a:pPr algn="ctr"/>
-          </a:p>
-        </p:txBody>
-      </p:sp>
-      <p:sp>
-        <p:nvSpPr>
-          <p:cNvPr id="8" name="TextBox 7"/>
-          <p:cNvSpPr txBox="1"/>
-          <p:nvPr/>
-        </p:nvSpPr>
-        <p:spPr>
-          <a:xfrm>
-            <a:off x="914400" y="3913632"/>
-            <a:ext cx="8321040" cy="685800"/>
-          </a:xfrm>
-          <a:prstGeom prst="rect">
-            <a:avLst/>
-          </a:prstGeom>
-          <a:noFill/>
-        </p:spPr>
-        <p:txBody>
-          <a:bodyPr wrap="square" anchor="ctr">
-            <a:spAutoFit/>
-          </a:bodyPr>
-          <a:lstStyle/>
-          <a:p>
-            <a:pPr algn="l">
-              <a:spcAft>
-                <a:spcPts val="400"/>
-              </a:spcAft>
-            </a:pPr>
-            <a:r>
-              <a:rPr sz="2400" b="1">
-                <a:solidFill>
-                  <a:srgbClr val="991B1B"/>
-                </a:solidFill>
-                <a:latin typeface="Calibri"/>
-              </a:rPr>
-              <a:t>Kiểm chứng bằng lập luận toán học</a:t>
+            <a:r>
+              <a:rPr sz="1400" b="1">
+                <a:solidFill>
+                  <a:srgbClr val="FFFFFF"/>
+                </a:solidFill>
+                <a:latin typeface="Arial"/>
+              </a:rPr>
+              <a:t>ĐỀ BÀI</a:t>
             </a:r>
           </a:p>
         </p:txBody>
@@ -8100,7 +8933,7 @@
         <p:spPr>
           <a:xfrm>
             <a:off x="731520" y="274320"/>
-            <a:ext cx="10972800" cy="868680"/>
+            <a:ext cx="9610344" cy="868680"/>
           </a:xfrm>
           <a:prstGeom prst="rect">
             <a:avLst/>
@@ -8120,7 +8953,7 @@
                 </a:solidFill>
                 <a:latin typeface="Arial"/>
               </a:rPr>
-              <a:t>LUYỆN TẬP 1.2 – LỜI GIẢI</a:t>
+              <a:t>TRẠM KIỂM CHỨNG AI</a:t>
             </a:r>
           </a:p>
         </p:txBody>
@@ -8199,7 +9032,7 @@
                 </a:solidFill>
                 <a:latin typeface="Calibri"/>
               </a:rPr>
-              <a:t>Toán 10 · Bài 1. Mệnh đề          20</a:t>
+              <a:t>Toán 10 · Bài 1. Mệnh đề          22</a:t>
             </a:r>
           </a:p>
         </p:txBody>
@@ -8213,7 +9046,7 @@
         <p:spPr>
           <a:xfrm>
             <a:off x="731520" y="1508760"/>
-            <a:ext cx="10789920" cy="2834640"/>
+            <a:ext cx="10789920" cy="2267712"/>
           </a:xfrm>
           <a:prstGeom prst="rect">
             <a:avLst/>
@@ -8238,7 +9071,7 @@
                 </a:solidFill>
                 <a:latin typeface="Calibri"/>
               </a:rPr>
-              <a:t>Xét tính đúng sai</a:t>
+              <a:t>Tìm lỗi trong câu trả lời AI</a:t>
             </a:r>
           </a:p>
           <a:p>
@@ -8259,7 +9092,7 @@
                 </a:solidFill>
                 <a:latin typeface="Calibri"/>
               </a:rPr>
-              <a:t>a) π &gt; 10/3  →  Sai</a:t>
+              <a:t>Phủ định “mọi” thành “mọi … không”</a:t>
             </a:r>
           </a:p>
           <a:p>
@@ -8280,7 +9113,7 @@
                 </a:solidFill>
                 <a:latin typeface="Calibri"/>
               </a:rPr>
-              <a:t>b) 3x + 7 = 0 có nghiệm  →  Đúng</a:t>
+              <a:t>Thuận đúng ⇒ đảo cũng đúng</a:t>
             </a:r>
           </a:p>
           <a:p>
@@ -8301,28 +9134,7 @@
                 </a:solidFill>
                 <a:latin typeface="Calibri"/>
               </a:rPr>
-              <a:t>c) ∃ số a: a + a = 0  →  Đúng</a:t>
-            </a:r>
-          </a:p>
-          <a:p>
-            <a:pPr algn="l" marL="365760" indent="-365760">
-              <a:spcAft>
-                <a:spcPts val="1000"/>
-              </a:spcAft>
-              <a:buClr>
-                <a:srgbClr val="1E40AF"/>
-              </a:buClr>
-              <a:buFont typeface="Arial"/>
-              <a:buChar char="•"/>
-            </a:pPr>
-            <a:r>
-              <a:rPr sz="2400">
-                <a:solidFill>
-                  <a:srgbClr val="1E293B"/>
-                </a:solidFill>
-                <a:latin typeface="Calibri"/>
-              </a:rPr>
-              <a:t>d) 2022 là hợp số  →  Đúng</a:t>
+              <a:t>Đổi chỗ điều kiện cần, đủ</a:t>
             </a:r>
           </a:p>
         </p:txBody>
@@ -8335,7 +9147,7 @@
         </p:nvSpPr>
         <p:spPr>
           <a:xfrm>
-            <a:off x="731520" y="4480560"/>
+            <a:off x="731520" y="3913632"/>
             <a:ext cx="8686800" cy="685800"/>
           </a:xfrm>
           <a:prstGeom prst="roundRect">
@@ -8383,7 +9195,7 @@
         </p:nvSpPr>
         <p:spPr>
           <a:xfrm>
-            <a:off x="914400" y="4480560"/>
+            <a:off x="914400" y="3913632"/>
             <a:ext cx="8321040" cy="685800"/>
           </a:xfrm>
           <a:prstGeom prst="rect">
@@ -8409,7 +9221,60 @@
                 </a:solidFill>
                 <a:latin typeface="Calibri"/>
               </a:rPr>
-              <a:t>π ≈ 3,14 &lt; 3,33 ≈ 10/3</a:t>
+              <a:t>Kiểm chứng bằng lập luận toán học</a:t>
+            </a:r>
+          </a:p>
+        </p:txBody>
+      </p:sp>
+      <p:sp>
+        <p:nvSpPr>
+          <p:cNvPr id="9" name="Rounded Rectangle 8"/>
+          <p:cNvSpPr/>
+          <p:nvPr/>
+        </p:nvSpPr>
+        <p:spPr>
+          <a:xfrm>
+            <a:off x="10463479" y="457200"/>
+            <a:ext cx="1179576" cy="457200"/>
+          </a:xfrm>
+          <a:prstGeom prst="roundRect">
+            <a:avLst/>
+          </a:prstGeom>
+          <a:solidFill>
+            <a:srgbClr val="166534"/>
+          </a:solidFill>
+          <a:ln>
+            <a:noFill/>
+          </a:ln>
+          <a:effectLst/>
+        </p:spPr>
+        <p:style>
+          <a:lnRef idx="1">
+            <a:schemeClr val="accent1"/>
+          </a:lnRef>
+          <a:fillRef idx="3">
+            <a:schemeClr val="accent1"/>
+          </a:fillRef>
+          <a:effectRef idx="2">
+            <a:schemeClr val="accent1"/>
+          </a:effectRef>
+          <a:fontRef idx="minor">
+            <a:schemeClr val="lt1"/>
+          </a:fontRef>
+        </p:style>
+        <p:txBody>
+          <a:bodyPr rtlCol="0" anchor="ctr" tIns="0" bIns="0"/>
+          <a:lstStyle/>
+          <a:p>
+            <a:pPr algn="ctr"/>
+            <a:r>
+              <a:rPr sz="1400" b="1">
+                <a:solidFill>
+                  <a:srgbClr val="FFFFFF"/>
+                </a:solidFill>
+                <a:latin typeface="Arial"/>
+              </a:rPr>
+              <a:t>LỜI GIẢI</a:t>
             </a:r>
           </a:p>
         </p:txBody>
@@ -8513,7 +9378,7 @@
                 </a:solidFill>
                 <a:latin typeface="Arial"/>
               </a:rPr>
-              <a:t>LUYỆN TẬP 1.1 – LỜI GIẢI</a:t>
+              <a:t>NHIỆM VỤ VỀ NHÀ: THÁM TỬ MỆNH ĐỀ</a:t>
             </a:r>
           </a:p>
         </p:txBody>
@@ -8592,7 +9457,7 @@
                 </a:solidFill>
                 <a:latin typeface="Calibri"/>
               </a:rPr>
-              <a:t>Toán 10 · Bài 1. Mệnh đề          18</a:t>
+              <a:t>Toán 10 · Bài 1. Mệnh đề          23</a:t>
             </a:r>
           </a:p>
         </p:txBody>
@@ -8606,7 +9471,7 @@
         <p:spPr>
           <a:xfrm>
             <a:off x="731520" y="1508760"/>
-            <a:ext cx="10789920" cy="2834640"/>
+            <a:ext cx="10789920" cy="3401568"/>
           </a:xfrm>
           <a:prstGeom prst="rect">
             <a:avLst/>
@@ -8618,22 +9483,6 @@
             <a:spAutoFit/>
           </a:bodyPr>
           <a:lstStyle/>
-          <a:p>
-            <a:pPr algn="l">
-              <a:spcAft>
-                <a:spcPts val="1000"/>
-              </a:spcAft>
-            </a:pPr>
-            <a:r>
-              <a:rPr sz="2400" b="1">
-                <a:solidFill>
-                  <a:srgbClr val="1E40AF"/>
-                </a:solidFill>
-                <a:latin typeface="Calibri"/>
-              </a:rPr>
-              <a:t>Câu nào là mệnh đề?</a:t>
-            </a:r>
-          </a:p>
           <a:p>
             <a:pPr algn="l" marL="365760" indent="-365760">
               <a:spcAft>
@@ -8652,7 +9501,7 @@
                 </a:solidFill>
                 <a:latin typeface="Calibri"/>
               </a:rPr>
-              <a:t>a) Trung Quốc đông dân nhất</a:t>
+              <a:t>Sưu tầm 3 phát biểu trên mạng</a:t>
             </a:r>
           </a:p>
           <a:p>
@@ -8673,7 +9522,7 @@
                 </a:solidFill>
                 <a:latin typeface="Calibri"/>
               </a:rPr>
-              <a:t>b) Bạn học trường nào?</a:t>
+              <a:t>Có dạng “nếu … thì”, “mọi”, “có”</a:t>
             </a:r>
           </a:p>
           <a:p>
@@ -8694,7 +9543,7 @@
                 </a:solidFill>
                 <a:latin typeface="Calibri"/>
               </a:rPr>
-              <a:t>c) Không được làm việc riêng</a:t>
+              <a:t>Viết lại bằng ⇒, ∀, ∃</a:t>
             </a:r>
           </a:p>
           <a:p>
@@ -8715,94 +9564,49 @@
                 </a:solidFill>
                 <a:latin typeface="Calibri"/>
               </a:rPr>
-              <a:t>d) Tôi sẽ sút trúng xà ngang</a:t>
-            </a:r>
-          </a:p>
-        </p:txBody>
-      </p:sp>
-      <p:sp>
-        <p:nvSpPr>
-          <p:cNvPr id="7" name="Rounded Rectangle 6"/>
-          <p:cNvSpPr/>
-          <p:nvPr/>
-        </p:nvSpPr>
-        <p:spPr>
-          <a:xfrm>
-            <a:off x="731520" y="4480560"/>
-            <a:ext cx="8686800" cy="685800"/>
-          </a:xfrm>
-          <a:prstGeom prst="roundRect">
-            <a:avLst>
-              <a:gd name="adj" fmla="val 8000"/>
-            </a:avLst>
-          </a:prstGeom>
-          <a:solidFill>
-            <a:srgbClr val="FEF2F2"/>
-          </a:solidFill>
-          <a:ln w="19050">
-            <a:solidFill>
-              <a:srgbClr val="991B1B"/>
-            </a:solidFill>
-          </a:ln>
-          <a:effectLst/>
-        </p:spPr>
-        <p:style>
-          <a:lnRef idx="1">
-            <a:schemeClr val="accent1"/>
-          </a:lnRef>
-          <a:fillRef idx="3">
-            <a:schemeClr val="accent1"/>
-          </a:fillRef>
-          <a:effectRef idx="2">
-            <a:schemeClr val="accent1"/>
-          </a:effectRef>
-          <a:fontRef idx="minor">
-            <a:schemeClr val="lt1"/>
-          </a:fontRef>
-        </p:style>
-        <p:txBody>
-          <a:bodyPr rtlCol="0" anchor="ctr"/>
-          <a:lstStyle/>
-          <a:p>
-            <a:pPr algn="ctr"/>
-          </a:p>
-        </p:txBody>
-      </p:sp>
-      <p:sp>
-        <p:nvSpPr>
-          <p:cNvPr id="8" name="TextBox 7"/>
-          <p:cNvSpPr txBox="1"/>
-          <p:nvPr/>
-        </p:nvSpPr>
-        <p:spPr>
-          <a:xfrm>
-            <a:off x="914400" y="4480560"/>
-            <a:ext cx="8321040" cy="685800"/>
-          </a:xfrm>
-          <a:prstGeom prst="rect">
-            <a:avLst/>
-          </a:prstGeom>
-          <a:noFill/>
-        </p:spPr>
-        <p:txBody>
-          <a:bodyPr wrap="square" anchor="ctr">
-            <a:spAutoFit/>
-          </a:bodyPr>
-          <a:lstStyle/>
-          <a:p>
-            <a:pPr algn="l">
+              <a:t>Lập phủ định, kết luận đúng/sai</a:t>
+            </a:r>
+          </a:p>
+          <a:p>
+            <a:pPr algn="l" marL="365760" indent="-365760">
               <a:spcAft>
-                <a:spcPts val="400"/>
+                <a:spcPts val="1000"/>
               </a:spcAft>
+              <a:buClr>
+                <a:srgbClr val="1E40AF"/>
+              </a:buClr>
+              <a:buFont typeface="Arial"/>
+              <a:buChar char="•"/>
             </a:pPr>
             <a:r>
-              <a:rPr sz="2400" b="1">
-                <a:solidFill>
-                  <a:srgbClr val="991B1B"/>
+              <a:rPr sz="2400">
+                <a:solidFill>
+                  <a:srgbClr val="1E293B"/>
                 </a:solidFill>
                 <a:latin typeface="Calibri"/>
               </a:rPr>
-              <a:t>Chỉ câu a) là mệnh đề</a:t>
+              <a:t>Làm poster hoặc 3–5 slide</a:t>
+            </a:r>
+          </a:p>
+          <a:p>
+            <a:pPr algn="l" marL="365760" indent="-365760">
+              <a:spcAft>
+                <a:spcPts val="1000"/>
+              </a:spcAft>
+              <a:buClr>
+                <a:srgbClr val="1E40AF"/>
+              </a:buClr>
+              <a:buFont typeface="Arial"/>
+              <a:buChar char="•"/>
+            </a:pPr>
+            <a:r>
+              <a:rPr sz="2400">
+                <a:solidFill>
+                  <a:srgbClr val="1E293B"/>
+                </a:solidFill>
+                <a:latin typeface="Calibri"/>
+              </a:rPr>
+              <a:t>Nộp Padlet kèm Nhật ký AI</a:t>
             </a:r>
           </a:p>
         </p:txBody>
@@ -8906,7 +9710,7 @@
                 </a:solidFill>
                 <a:latin typeface="Arial"/>
               </a:rPr>
-              <a:t>LUYỆN TẬP – LỜI GIẢI</a:t>
+              <a:t>SƠ ĐỒ TƯ DUY BÀI HỌC</a:t>
             </a:r>
           </a:p>
         </p:txBody>
@@ -8985,477 +9789,35 @@
                 </a:solidFill>
                 <a:latin typeface="Calibri"/>
               </a:rPr>
-              <a:t>Toán 10 · Bài 1. Mệnh đề          10</a:t>
-            </a:r>
-          </a:p>
-        </p:txBody>
-      </p:sp>
-      <mc:AlternateContent xmlns:mc="http://schemas.openxmlformats.org/markup-compatibility/2006">
-        <mc:Choice xmlns:a14="http://schemas.microsoft.com/office/drawing/2010/main" Requires="a14">
-          <p:sp>
-            <p:nvSpPr>
-              <p:cNvPr id="6" name="TextBox 5"/>
-              <p:cNvSpPr txBox="1"/>
-              <p:nvPr/>
-            </p:nvSpPr>
-            <p:spPr>
-              <a:xfrm>
-                <a:off x="731520" y="1508760"/>
-                <a:ext cx="10789920" cy="2267712"/>
-              </a:xfrm>
-              <a:prstGeom prst="rect">
-                <a:avLst/>
-              </a:prstGeom>
-              <a:noFill/>
-            </p:spPr>
-            <p:txBody>
-              <a:bodyPr wrap="square" anchor="t">
-                <a:spAutoFit/>
-              </a:bodyPr>
-              <a:lstStyle/>
-              <a:p>
-                <a:pPr algn="l" marL="365760" indent="-365760">
-                  <a:spcAft>
-                    <a:spcPts val="1000"/>
-                  </a:spcAft>
-                  <a:buClr>
-                    <a:srgbClr val="1E40AF"/>
-                  </a:buClr>
-                  <a:buFont typeface="Arial"/>
-                  <a:buChar char="•"/>
-                </a:pPr>
-                <a:r>
-                  <a:rPr sz="2400">
-                    <a:solidFill>
-                      <a:srgbClr val="1E293B"/>
-                    </a:solidFill>
-                    <a:latin typeface="Calibri"/>
-                  </a:rPr>
-                  <a:t>P: “2022 chia hết cho 5”</a:t>
-                </a:r>
-              </a:p>
-              <a:p>
-                <a:pPr algn="l" marL="365760" indent="-365760">
-                  <a:spcAft>
-                    <a:spcPts val="1000"/>
-                  </a:spcAft>
-                  <a:buClr>
-                    <a:srgbClr val="1E40AF"/>
-                  </a:buClr>
-                  <a:buFont typeface="Arial"/>
-                  <a:buChar char="•"/>
-                </a:pPr>
-                <a14:m xmlns:m="http://schemas.openxmlformats.org/officeDocument/2006/math">
-                  <m:oMath>
-                    <m:bar>
-                      <m:barPr>
-                        <m:pos m:val="top"/>
-                      </m:barPr>
-                      <m:e>
-                        <m:r>
-                          <a:rPr lang="vi-VN" sz="2400" b="0" i="1">
-                            <a:solidFill>
-                              <a:srgbClr val="1E293B"/>
-                            </a:solidFill>
-                            <a:latin typeface="Cambria Math" panose="02040503050406030204" pitchFamily="18" charset="0"/>
-                          </a:rPr>
-                          <m:t>P</m:t>
-                        </m:r>
-                      </m:e>
-                    </m:bar>
-                  </m:oMath>
-                </a14:m>
-                <a:r>
-                  <a:rPr sz="2400">
-                    <a:solidFill>
-                      <a:srgbClr val="1E293B"/>
-                    </a:solidFill>
-                    <a:latin typeface="Calibri"/>
-                  </a:rPr>
-                  <a:t>: “2022 không chia hết cho 5”</a:t>
-                </a:r>
-              </a:p>
-              <a:p>
-                <a:pPr algn="l" marL="365760" indent="-365760">
-                  <a:spcAft>
-                    <a:spcPts val="1000"/>
-                  </a:spcAft>
-                  <a:buClr>
-                    <a:srgbClr val="1E40AF"/>
-                  </a:buClr>
-                  <a:buFont typeface="Arial"/>
-                  <a:buChar char="•"/>
-                </a:pPr>
-                <a:r>
-                  <a:rPr sz="2400">
-                    <a:solidFill>
-                      <a:srgbClr val="1E293B"/>
-                    </a:solidFill>
-                    <a:latin typeface="Calibri"/>
-                  </a:rPr>
-                  <a:t>Q: “2x + 1 &gt; 0 có nghiệm”</a:t>
-                </a:r>
-              </a:p>
-              <a:p>
-                <a:pPr algn="l" marL="365760" indent="-365760">
-                  <a:spcAft>
-                    <a:spcPts val="1000"/>
-                  </a:spcAft>
-                  <a:buClr>
-                    <a:srgbClr val="1E40AF"/>
-                  </a:buClr>
-                  <a:buFont typeface="Arial"/>
-                  <a:buChar char="•"/>
-                </a:pPr>
-                <a14:m xmlns:m="http://schemas.openxmlformats.org/officeDocument/2006/math">
-                  <m:oMath>
-                    <m:bar>
-                      <m:barPr>
-                        <m:pos m:val="top"/>
-                      </m:barPr>
-                      <m:e>
-                        <m:r>
-                          <a:rPr lang="vi-VN" sz="2400" b="0" i="1">
-                            <a:solidFill>
-                              <a:srgbClr val="1E293B"/>
-                            </a:solidFill>
-                            <a:latin typeface="Cambria Math" panose="02040503050406030204" pitchFamily="18" charset="0"/>
-                          </a:rPr>
-                          <m:t>Q</m:t>
-                        </m:r>
-                      </m:e>
-                    </m:bar>
-                  </m:oMath>
-                </a14:m>
-                <a:r>
-                  <a:rPr sz="2400">
-                    <a:solidFill>
-                      <a:srgbClr val="1E293B"/>
-                    </a:solidFill>
-                    <a:latin typeface="Calibri"/>
-                  </a:rPr>
-                  <a:t>: “2x + 1 &gt; 0 vô nghiệm”</a:t>
-                </a:r>
-              </a:p>
-            </p:txBody>
-          </p:sp>
-        </mc:Choice>
-        <mc:Fallback>
-          <p:sp>
-            <p:nvSpPr>
-              <p:cNvPr id="6" name="TextBox 5"/>
-              <p:cNvSpPr txBox="1"/>
-              <p:nvPr/>
-            </p:nvSpPr>
-            <p:spPr>
-              <a:xfrm>
-                <a:off x="731520" y="1508760"/>
-                <a:ext cx="10789920" cy="2267712"/>
-              </a:xfrm>
-              <a:prstGeom prst="rect">
-                <a:avLst/>
-              </a:prstGeom>
-              <a:noFill/>
-            </p:spPr>
-            <p:txBody>
-              <a:bodyPr wrap="square" anchor="t">
-                <a:spAutoFit/>
-              </a:bodyPr>
-              <a:lstStyle/>
-              <a:p>
-                <a:pPr algn="l" marL="365760" indent="-365760">
-                  <a:spcAft>
-                    <a:spcPts val="1000"/>
-                  </a:spcAft>
-                  <a:buClr>
-                    <a:srgbClr val="1E40AF"/>
-                  </a:buClr>
-                  <a:buFont typeface="Arial"/>
-                  <a:buChar char="•"/>
-                </a:pPr>
-                <a:r>
-                  <a:rPr sz="2400">
-                    <a:solidFill>
-                      <a:srgbClr val="1E293B"/>
-                    </a:solidFill>
-                    <a:latin typeface="Calibri"/>
-                  </a:rPr>
-                  <a:t>P: “2022 chia hết cho 5”</a:t>
-                </a:r>
-              </a:p>
-              <a:p>
-                <a:pPr algn="l" marL="365760" indent="-365760">
-                  <a:spcAft>
-                    <a:spcPts val="1000"/>
-                  </a:spcAft>
-                  <a:buClr>
-                    <a:srgbClr val="1E40AF"/>
-                  </a:buClr>
-                  <a:buFont typeface="Arial"/>
-                  <a:buChar char="•"/>
-                </a:pPr>
-                <a:r>
-                  <a:rPr lang="vi-VN"/>
-                  <a:t>P̅</a:t>
-                </a:r>
-                <a:r>
-                  <a:rPr sz="2400">
-                    <a:solidFill>
-                      <a:srgbClr val="1E293B"/>
-                    </a:solidFill>
-                    <a:latin typeface="Calibri"/>
-                  </a:rPr>
-                  <a:t>: “2022 không chia hết cho 5”</a:t>
-                </a:r>
-              </a:p>
-              <a:p>
-                <a:pPr algn="l" marL="365760" indent="-365760">
-                  <a:spcAft>
-                    <a:spcPts val="1000"/>
-                  </a:spcAft>
-                  <a:buClr>
-                    <a:srgbClr val="1E40AF"/>
-                  </a:buClr>
-                  <a:buFont typeface="Arial"/>
-                  <a:buChar char="•"/>
-                </a:pPr>
-                <a:r>
-                  <a:rPr sz="2400">
-                    <a:solidFill>
-                      <a:srgbClr val="1E293B"/>
-                    </a:solidFill>
-                    <a:latin typeface="Calibri"/>
-                  </a:rPr>
-                  <a:t>Q: “2x + 1 &gt; 0 có nghiệm”</a:t>
-                </a:r>
-              </a:p>
-              <a:p>
-                <a:pPr algn="l" marL="365760" indent="-365760">
-                  <a:spcAft>
-                    <a:spcPts val="1000"/>
-                  </a:spcAft>
-                  <a:buClr>
-                    <a:srgbClr val="1E40AF"/>
-                  </a:buClr>
-                  <a:buFont typeface="Arial"/>
-                  <a:buChar char="•"/>
-                </a:pPr>
-                <a:r>
-                  <a:rPr lang="vi-VN"/>
-                  <a:t>Q̅</a:t>
-                </a:r>
-                <a:r>
-                  <a:rPr sz="2400">
-                    <a:solidFill>
-                      <a:srgbClr val="1E293B"/>
-                    </a:solidFill>
-                    <a:latin typeface="Calibri"/>
-                  </a:rPr>
-                  <a:t>: “2x + 1 &gt; 0 vô nghiệm”</a:t>
-                </a:r>
-              </a:p>
-            </p:txBody>
-          </p:sp>
-        </mc:Fallback>
-      </mc:AlternateContent>
-      <p:sp>
-        <p:nvSpPr>
-          <p:cNvPr id="7" name="Rounded Rectangle 6"/>
-          <p:cNvSpPr/>
-          <p:nvPr/>
-        </p:nvSpPr>
-        <p:spPr>
-          <a:xfrm>
-            <a:off x="731520" y="3913632"/>
-            <a:ext cx="8686800" cy="685800"/>
-          </a:xfrm>
-          <a:prstGeom prst="roundRect">
-            <a:avLst>
-              <a:gd name="adj" fmla="val 8000"/>
-            </a:avLst>
-          </a:prstGeom>
-          <a:solidFill>
-            <a:srgbClr val="FEF2F2"/>
-          </a:solidFill>
-          <a:ln w="19050">
-            <a:solidFill>
-              <a:srgbClr val="991B1B"/>
-            </a:solidFill>
-          </a:ln>
-          <a:effectLst/>
-        </p:spPr>
-        <p:style>
-          <a:lnRef idx="1">
-            <a:schemeClr val="accent1"/>
-          </a:lnRef>
-          <a:fillRef idx="3">
-            <a:schemeClr val="accent1"/>
-          </a:fillRef>
-          <a:effectRef idx="2">
-            <a:schemeClr val="accent1"/>
-          </a:effectRef>
-          <a:fontRef idx="minor">
-            <a:schemeClr val="lt1"/>
-          </a:fontRef>
-        </p:style>
-        <p:txBody>
-          <a:bodyPr rtlCol="0" anchor="ctr"/>
-          <a:lstStyle/>
-          <a:p>
-            <a:pPr algn="ctr"/>
-          </a:p>
-        </p:txBody>
-      </p:sp>
-      <mc:AlternateContent xmlns:mc="http://schemas.openxmlformats.org/markup-compatibility/2006">
-        <mc:Choice xmlns:a14="http://schemas.microsoft.com/office/drawing/2010/main" Requires="a14">
-          <p:sp>
-            <p:nvSpPr>
-              <p:cNvPr id="8" name="TextBox 7"/>
-              <p:cNvSpPr txBox="1"/>
-              <p:nvPr/>
-            </p:nvSpPr>
-            <p:spPr>
-              <a:xfrm>
-                <a:off x="914400" y="3913632"/>
-                <a:ext cx="8321040" cy="685800"/>
-              </a:xfrm>
-              <a:prstGeom prst="rect">
-                <a:avLst/>
-              </a:prstGeom>
-              <a:noFill/>
-            </p:spPr>
-            <p:txBody>
-              <a:bodyPr wrap="square" anchor="ctr">
-                <a:spAutoFit/>
-              </a:bodyPr>
-              <a:lstStyle/>
-              <a:p>
-                <a:pPr algn="l">
-                  <a:spcAft>
-                    <a:spcPts val="400"/>
-                  </a:spcAft>
-                </a:pPr>
-                <a14:m xmlns:m="http://schemas.openxmlformats.org/officeDocument/2006/math">
-                  <m:oMath>
-                    <m:bar>
-                      <m:barPr>
-                        <m:pos m:val="top"/>
-                      </m:barPr>
-                      <m:e>
-                        <m:r>
-                          <a:rPr lang="vi-VN" sz="2400" b="1" i="1">
-                            <a:solidFill>
-                              <a:srgbClr val="991B1B"/>
-                            </a:solidFill>
-                            <a:latin typeface="Cambria Math" panose="02040503050406030204" pitchFamily="18" charset="0"/>
-                          </a:rPr>
-                          <m:t>P</m:t>
-                        </m:r>
-                      </m:e>
-                    </m:bar>
-                  </m:oMath>
-                </a14:m>
-                <a:r>
-                  <a:rPr sz="2400" b="1">
-                    <a:solidFill>
-                      <a:srgbClr val="991B1B"/>
-                    </a:solidFill>
-                    <a:latin typeface="Calibri"/>
-                  </a:rPr>
-                  <a:t> đúng; </a:t>
-                </a:r>
-                <a14:m xmlns:m="http://schemas.openxmlformats.org/officeDocument/2006/math">
-                  <m:oMath>
-                    <m:bar>
-                      <m:barPr>
-                        <m:pos m:val="top"/>
-                      </m:barPr>
-                      <m:e>
-                        <m:r>
-                          <a:rPr lang="vi-VN" sz="2400" b="1" i="1">
-                            <a:solidFill>
-                              <a:srgbClr val="991B1B"/>
-                            </a:solidFill>
-                            <a:latin typeface="Cambria Math" panose="02040503050406030204" pitchFamily="18" charset="0"/>
-                          </a:rPr>
-                          <m:t>Q</m:t>
-                        </m:r>
-                      </m:e>
-                    </m:bar>
-                  </m:oMath>
-                </a14:m>
-                <a:r>
-                  <a:rPr sz="2400" b="1">
-                    <a:solidFill>
-                      <a:srgbClr val="991B1B"/>
-                    </a:solidFill>
-                    <a:latin typeface="Calibri"/>
-                  </a:rPr>
-                  <a:t> sai (vì x = 0)</a:t>
-                </a:r>
-              </a:p>
-            </p:txBody>
-          </p:sp>
-        </mc:Choice>
-        <mc:Fallback>
-          <p:sp>
-            <p:nvSpPr>
-              <p:cNvPr id="8" name="TextBox 7"/>
-              <p:cNvSpPr txBox="1"/>
-              <p:nvPr/>
-            </p:nvSpPr>
-            <p:spPr>
-              <a:xfrm>
-                <a:off x="914400" y="3913632"/>
-                <a:ext cx="8321040" cy="685800"/>
-              </a:xfrm>
-              <a:prstGeom prst="rect">
-                <a:avLst/>
-              </a:prstGeom>
-              <a:noFill/>
-            </p:spPr>
-            <p:txBody>
-              <a:bodyPr wrap="square" anchor="ctr">
-                <a:spAutoFit/>
-              </a:bodyPr>
-              <a:lstStyle/>
-              <a:p>
-                <a:pPr algn="l">
-                  <a:spcAft>
-                    <a:spcPts val="400"/>
-                  </a:spcAft>
-                </a:pPr>
-                <a:r>
-                  <a:rPr lang="vi-VN"/>
-                  <a:t>P̅</a:t>
-                </a:r>
-                <a:r>
-                  <a:rPr sz="2400" b="1">
-                    <a:solidFill>
-                      <a:srgbClr val="991B1B"/>
-                    </a:solidFill>
-                    <a:latin typeface="Calibri"/>
-                  </a:rPr>
-                  <a:t> đúng; </a:t>
-                </a:r>
-                <a:r>
-                  <a:rPr lang="vi-VN"/>
-                  <a:t>Q̅</a:t>
-                </a:r>
-                <a:r>
-                  <a:rPr sz="2400" b="1">
-                    <a:solidFill>
-                      <a:srgbClr val="991B1B"/>
-                    </a:solidFill>
-                    <a:latin typeface="Calibri"/>
-                  </a:rPr>
-                  <a:t> sai (vì x = 0)</a:t>
-                </a:r>
-              </a:p>
-            </p:txBody>
-          </p:sp>
-        </mc:Fallback>
-      </mc:AlternateContent>
+              <a:t>Toán 10 · Bài 1. Mệnh đề          24</a:t>
+            </a:r>
+          </a:p>
+        </p:txBody>
+      </p:sp>
+      <p:pic>
+        <p:nvPicPr>
+          <p:cNvPr id="6" name="Picture 5" descr="rId15.png"/>
+          <p:cNvPicPr>
+            <a:picLocks noChangeAspect="1"/>
+          </p:cNvPicPr>
+          <p:nvPr/>
+        </p:nvPicPr>
+        <p:blipFill>
+          <a:blip r:embed="rId2"/>
+          <a:stretch>
+            <a:fillRect/>
+          </a:stretch>
+        </p:blipFill>
+        <p:spPr>
+          <a:xfrm>
+            <a:off x="2452400" y="1417320"/>
+            <a:ext cx="7256720" cy="4800600"/>
+          </a:xfrm>
+          <a:prstGeom prst="rect">
+            <a:avLst/>
+          </a:prstGeom>
+        </p:spPr>
+      </p:pic>
     </p:spTree>
   </p:cSld>
   <p:clrMapOvr>
@@ -9555,7 +9917,7 @@
                 </a:solidFill>
                 <a:latin typeface="Arial"/>
               </a:rPr>
-              <a:t>VÍ DỤ 1 – LỜI GIẢI</a:t>
+              <a:t>BÀI TẬP CỦA BẠN</a:t>
             </a:r>
           </a:p>
         </p:txBody>
@@ -9634,21 +9996,91 @@
                 </a:solidFill>
                 <a:latin typeface="Calibri"/>
               </a:rPr>
-              <a:t>Toán 10 · Bài 1. Mệnh đề          6</a:t>
-            </a:r>
-          </a:p>
-        </p:txBody>
-      </p:sp>
-      <p:sp>
-        <p:nvSpPr>
-          <p:cNvPr id="6" name="TextBox 5"/>
+              <a:t>Toán 10 · Bài 1. Mệnh đề          25</a:t>
+            </a:r>
+          </a:p>
+        </p:txBody>
+      </p:sp>
+      <p:sp>
+        <p:nvSpPr>
+          <p:cNvPr id="6" name="Rectangle 5"/>
+          <p:cNvSpPr/>
+          <p:nvPr/>
+        </p:nvSpPr>
+        <p:spPr>
+          <a:xfrm>
+            <a:off x="731520" y="1463040"/>
+            <a:ext cx="4572000" cy="4572000"/>
+          </a:xfrm>
+          <a:prstGeom prst="rect">
+            <a:avLst/>
+          </a:prstGeom>
+          <a:solidFill>
+            <a:srgbClr val="F8FAFC"/>
+          </a:solidFill>
+          <a:ln w="19050">
+            <a:solidFill>
+              <a:srgbClr val="E2E8F0"/>
+            </a:solidFill>
+          </a:ln>
+          <a:effectLst/>
+        </p:spPr>
+        <p:style>
+          <a:lnRef idx="1">
+            <a:schemeClr val="accent1"/>
+          </a:lnRef>
+          <a:fillRef idx="3">
+            <a:schemeClr val="accent1"/>
+          </a:fillRef>
+          <a:effectRef idx="2">
+            <a:schemeClr val="accent1"/>
+          </a:effectRef>
+          <a:fontRef idx="minor">
+            <a:schemeClr val="lt1"/>
+          </a:fontRef>
+        </p:style>
+        <p:txBody>
+          <a:bodyPr rtlCol="0" anchor="ctr"/>
+          <a:lstStyle/>
+          <a:p>
+            <a:pPr algn="ctr"/>
+          </a:p>
+        </p:txBody>
+      </p:sp>
+      <p:pic>
+        <p:nvPicPr>
+          <p:cNvPr id="7" name="Picture 6" descr="QR_CungCo_Bai1_Toan10.png"/>
+          <p:cNvPicPr>
+            <a:picLocks noChangeAspect="1"/>
+          </p:cNvPicPr>
+          <p:nvPr/>
+        </p:nvPicPr>
+        <p:blipFill>
+          <a:blip r:embed="rId2"/>
+          <a:stretch>
+            <a:fillRect/>
+          </a:stretch>
+        </p:blipFill>
+        <p:spPr>
+          <a:xfrm>
+            <a:off x="960120" y="1691640"/>
+            <a:ext cx="4114800" cy="4114800"/>
+          </a:xfrm>
+          <a:prstGeom prst="rect">
+            <a:avLst/>
+          </a:prstGeom>
+        </p:spPr>
+      </p:pic>
+      <p:sp>
+        <p:nvSpPr>
+          <p:cNvPr id="8" name="TextBox 7"/>
           <p:cNvSpPr txBox="1"/>
           <p:nvPr/>
         </p:nvSpPr>
         <p:spPr>
           <a:xfrm>
-            <a:off x="731520" y="1508760"/>
-            <a:ext cx="10789920" cy="2267712"/>
+            <a:off x="5760720" y="1554480"/>
+            <a:ext cx="6035040" cy="3108960"/>
           </a:xfrm>
           <a:prstGeom prst="rect">
             <a:avLst/>
@@ -9672,13 +10104,13 @@
               <a:buChar char="•"/>
             </a:pPr>
             <a:r>
-              <a:rPr sz="2400">
+              <a:rPr sz="2600">
                 <a:solidFill>
                   <a:srgbClr val="1E293B"/>
                 </a:solidFill>
                 <a:latin typeface="Calibri"/>
               </a:rPr>
-              <a:t>a) 3x² − 5x + 2 = 0 có nghiệm nguyên</a:t>
+              <a:t>Quét mã QR bằng điện thoại</a:t>
             </a:r>
           </a:p>
           <a:p>
@@ -9693,13 +10125,13 @@
               <a:buChar char="•"/>
             </a:pPr>
             <a:r>
-              <a:rPr sz="2400">
+              <a:rPr sz="2600">
                 <a:solidFill>
                   <a:srgbClr val="1E293B"/>
                 </a:solidFill>
                 <a:latin typeface="Calibri"/>
               </a:rPr>
-              <a:t>b) 5 &lt; 7 − 3</a:t>
+              <a:t>Nhập họ tên và lớp</a:t>
             </a:r>
           </a:p>
           <a:p>
@@ -9714,13 +10146,13 @@
               <a:buChar char="•"/>
             </a:pPr>
             <a:r>
-              <a:rPr sz="2400">
+              <a:rPr sz="2600">
                 <a:solidFill>
                   <a:srgbClr val="1E293B"/>
                 </a:solidFill>
                 <a:latin typeface="Calibri"/>
               </a:rPr>
-              <a:t>c) Có mấy dấu hiệu đồng dạng?</a:t>
+              <a:t>7 câu – làm trong 7 phút</a:t>
             </a:r>
           </a:p>
           <a:p>
@@ -9735,75 +10167,27 @@
               <a:buChar char="•"/>
             </a:pPr>
             <a:r>
-              <a:rPr sz="2400">
+              <a:rPr sz="2600">
                 <a:solidFill>
                   <a:srgbClr val="1E293B"/>
                 </a:solidFill>
                 <a:latin typeface="Calibri"/>
               </a:rPr>
-              <a:t>d) Đấy là cách xử lí khôn ngoan!</a:t>
-            </a:r>
-          </a:p>
-        </p:txBody>
-      </p:sp>
-      <p:sp>
-        <p:nvSpPr>
-          <p:cNvPr id="7" name="Rounded Rectangle 6"/>
-          <p:cNvSpPr/>
-          <p:nvPr/>
-        </p:nvSpPr>
-        <p:spPr>
-          <a:xfrm>
-            <a:off x="731520" y="3913632"/>
-            <a:ext cx="8686800" cy="1143000"/>
-          </a:xfrm>
-          <a:prstGeom prst="roundRect">
-            <a:avLst>
-              <a:gd name="adj" fmla="val 8000"/>
-            </a:avLst>
-          </a:prstGeom>
-          <a:solidFill>
-            <a:srgbClr val="FEF2F2"/>
-          </a:solidFill>
-          <a:ln w="19050">
-            <a:solidFill>
-              <a:srgbClr val="991B1B"/>
-            </a:solidFill>
-          </a:ln>
-          <a:effectLst/>
-        </p:spPr>
-        <p:style>
-          <a:lnRef idx="1">
-            <a:schemeClr val="accent1"/>
-          </a:lnRef>
-          <a:fillRef idx="3">
-            <a:schemeClr val="accent1"/>
-          </a:fillRef>
-          <a:effectRef idx="2">
-            <a:schemeClr val="accent1"/>
-          </a:effectRef>
-          <a:fontRef idx="minor">
-            <a:schemeClr val="lt1"/>
-          </a:fontRef>
-        </p:style>
-        <p:txBody>
-          <a:bodyPr rtlCol="0" anchor="ctr"/>
-          <a:lstStyle/>
-          <a:p>
-            <a:pPr algn="ctr"/>
-          </a:p>
-        </p:txBody>
-      </p:sp>
-      <p:sp>
-        <p:nvSpPr>
-          <p:cNvPr id="8" name="TextBox 7"/>
+              <a:t>Nộp bài, xem lời giải</a:t>
+            </a:r>
+          </a:p>
+        </p:txBody>
+      </p:sp>
+      <p:sp>
+        <p:nvSpPr>
+          <p:cNvPr id="9" name="TextBox 8"/>
           <p:cNvSpPr txBox="1"/>
           <p:nvPr/>
         </p:nvSpPr>
         <p:spPr>
           <a:xfrm>
-            <a:off x="914400" y="3913632"/>
-            <a:ext cx="8321040" cy="1143000"/>
+            <a:off x="5760720" y="4754880"/>
+            <a:ext cx="6035040" cy="1188720"/>
           </a:xfrm>
           <a:prstGeom prst="rect">
             <a:avLst/>
@@ -9811,40 +10195,25 @@
           <a:noFill/>
         </p:spPr>
         <p:txBody>
-          <a:bodyPr wrap="square" anchor="ctr">
+          <a:bodyPr wrap="square" anchor="t">
             <a:spAutoFit/>
           </a:bodyPr>
           <a:lstStyle/>
           <a:p>
             <a:pPr algn="l">
               <a:spcAft>
-                <a:spcPts val="400"/>
+                <a:spcPts val="1000"/>
               </a:spcAft>
             </a:pPr>
             <a:r>
-              <a:rPr sz="2400" b="1">
-                <a:solidFill>
-                  <a:srgbClr val="991B1B"/>
+              <a:rPr sz="1800" b="1">
+                <a:solidFill>
+                  <a:srgbClr val="1E40AF"/>
                 </a:solidFill>
                 <a:latin typeface="Calibri"/>
-              </a:rPr>
-              <a:t>Mệnh đề: a (đúng, x = 1), b (sai)</a:t>
-            </a:r>
-          </a:p>
-          <a:p>
-            <a:pPr algn="l">
-              <a:spcAft>
-                <a:spcPts val="400"/>
-              </a:spcAft>
-            </a:pPr>
-            <a:r>
-              <a:rPr sz="2400" b="1">
-                <a:solidFill>
-                  <a:srgbClr val="991B1B"/>
-                </a:solidFill>
-                <a:latin typeface="Calibri"/>
-              </a:rPr>
-              <a:t>c, d không là mệnh đề</a:t>
+                <a:hlinkClick r:id="rId3"/>
+              </a:rPr>
+              <a:t>trangtu66.github.io/Taode_thi_online/cc_bai1_t10.html</a:t>
             </a:r>
           </a:p>
         </p:txBody>
@@ -10675,7 +11044,7 @@
         <p:spPr>
           <a:xfrm>
             <a:off x="731520" y="274320"/>
-            <a:ext cx="10972800" cy="868680"/>
+            <a:ext cx="9848088" cy="868680"/>
           </a:xfrm>
           <a:prstGeom prst="rect">
             <a:avLst/>
@@ -10919,6 +11288,59 @@
                 <a:latin typeface="Calibri"/>
               </a:rPr>
               <a:t>Gợi mở: Câu hỏi, câu cảm có đúng/sai?</a:t>
+            </a:r>
+          </a:p>
+        </p:txBody>
+      </p:sp>
+      <p:sp>
+        <p:nvSpPr>
+          <p:cNvPr id="7" name="Rounded Rectangle 6"/>
+          <p:cNvSpPr/>
+          <p:nvPr/>
+        </p:nvSpPr>
+        <p:spPr>
+          <a:xfrm>
+            <a:off x="10701223" y="457200"/>
+            <a:ext cx="941832" cy="457200"/>
+          </a:xfrm>
+          <a:prstGeom prst="roundRect">
+            <a:avLst/>
+          </a:prstGeom>
+          <a:solidFill>
+            <a:srgbClr val="1E40AF"/>
+          </a:solidFill>
+          <a:ln>
+            <a:noFill/>
+          </a:ln>
+          <a:effectLst/>
+        </p:spPr>
+        <p:style>
+          <a:lnRef idx="1">
+            <a:schemeClr val="accent1"/>
+          </a:lnRef>
+          <a:fillRef idx="3">
+            <a:schemeClr val="accent1"/>
+          </a:fillRef>
+          <a:effectRef idx="2">
+            <a:schemeClr val="accent1"/>
+          </a:effectRef>
+          <a:fontRef idx="minor">
+            <a:schemeClr val="lt1"/>
+          </a:fontRef>
+        </p:style>
+        <p:txBody>
+          <a:bodyPr rtlCol="0" anchor="ctr" tIns="0" bIns="0"/>
+          <a:lstStyle/>
+          <a:p>
+            <a:pPr algn="ctr"/>
+            <a:r>
+              <a:rPr sz="1400" b="1">
+                <a:solidFill>
+                  <a:srgbClr val="FFFFFF"/>
+                </a:solidFill>
+                <a:latin typeface="Arial"/>
+              </a:rPr>
+              <a:t>ĐỀ BÀI</a:t>
             </a:r>
           </a:p>
         </p:txBody>
@@ -11002,7 +11424,7 @@
         <p:spPr>
           <a:xfrm>
             <a:off x="731520" y="274320"/>
-            <a:ext cx="10972800" cy="868680"/>
+            <a:ext cx="9610344" cy="868680"/>
           </a:xfrm>
           <a:prstGeom prst="rect">
             <a:avLst/>
@@ -11022,7 +11444,7 @@
                 </a:solidFill>
                 <a:latin typeface="Arial"/>
               </a:rPr>
-              <a:t>MỆNH ĐỀ CHỨA BIẾN</a:t>
+              <a:t>VÍ DỤ 1: CÂU NÀO LÀ MỆNH ĐỀ?</a:t>
             </a:r>
           </a:p>
         </p:txBody>
@@ -11101,7 +11523,7 @@
                 </a:solidFill>
                 <a:latin typeface="Calibri"/>
               </a:rPr>
-              <a:t>Toán 10 · Bài 1. Mệnh đề          7</a:t>
+              <a:t>Toán 10 · Bài 1. Mệnh đề          6</a:t>
             </a:r>
           </a:p>
         </p:txBody>
@@ -11127,22 +11549,6 @@
             <a:spAutoFit/>
           </a:bodyPr>
           <a:lstStyle/>
-          <a:p>
-            <a:pPr algn="l">
-              <a:spcAft>
-                <a:spcPts val="1000"/>
-              </a:spcAft>
-            </a:pPr>
-            <a:r>
-              <a:rPr sz="2400" b="1">
-                <a:solidFill>
-                  <a:srgbClr val="1E40AF"/>
-                </a:solidFill>
-                <a:latin typeface="Calibri"/>
-              </a:rPr>
-              <a:t>“n chia hết cho 2” (n ∈ ℕ)</a:t>
-            </a:r>
-          </a:p>
           <a:p>
             <a:pPr algn="l" marL="365760" indent="-365760">
               <a:spcAft>
@@ -11161,7 +11567,7 @@
                 </a:solidFill>
                 <a:latin typeface="Calibri"/>
               </a:rPr>
-              <a:t>Chưa xét được đúng hay sai</a:t>
+              <a:t>a) 3x² − 5x + 2 = 0 có nghiệm nguyên</a:t>
             </a:r>
           </a:p>
           <a:p>
@@ -11182,7 +11588,7 @@
                 </a:solidFill>
                 <a:latin typeface="Calibri"/>
               </a:rPr>
-              <a:t>n = 5: mệnh đề sai</a:t>
+              <a:t>b) 5 &lt; 7 − 3</a:t>
             </a:r>
           </a:p>
           <a:p>
@@ -11203,7 +11609,28 @@
                 </a:solidFill>
                 <a:latin typeface="Calibri"/>
               </a:rPr>
-              <a:t>n = 10: mệnh đề đúng</a:t>
+              <a:t>c) Có mấy dấu hiệu đồng dạng?</a:t>
+            </a:r>
+          </a:p>
+          <a:p>
+            <a:pPr algn="l" marL="365760" indent="-365760">
+              <a:spcAft>
+                <a:spcPts val="1000"/>
+              </a:spcAft>
+              <a:buClr>
+                <a:srgbClr val="1E40AF"/>
+              </a:buClr>
+              <a:buFont typeface="Arial"/>
+              <a:buChar char="•"/>
+            </a:pPr>
+            <a:r>
+              <a:rPr sz="2400">
+                <a:solidFill>
+                  <a:srgbClr val="1E293B"/>
+                </a:solidFill>
+                <a:latin typeface="Calibri"/>
+              </a:rPr>
+              <a:t>d) Đấy là cách xử lí khôn ngoan!</a:t>
             </a:r>
           </a:p>
         </p:txBody>
@@ -11217,7 +11644,7 @@
         <p:spPr>
           <a:xfrm>
             <a:off x="731520" y="3913632"/>
-            <a:ext cx="8686800" cy="685800"/>
+            <a:ext cx="8686800" cy="1143000"/>
           </a:xfrm>
           <a:prstGeom prst="roundRect">
             <a:avLst>
@@ -11265,7 +11692,7 @@
         <p:spPr>
           <a:xfrm>
             <a:off x="914400" y="3913632"/>
-            <a:ext cx="8321040" cy="685800"/>
+            <a:ext cx="8321040" cy="1143000"/>
           </a:xfrm>
           <a:prstGeom prst="rect">
             <a:avLst/>
@@ -11290,7 +11717,76 @@
                 </a:solidFill>
                 <a:latin typeface="Calibri"/>
               </a:rPr>
-              <a:t>Gọi là mệnh đề chứa biến</a:t>
+              <a:t>Mệnh đề: a (đúng, x = 1), b (sai)</a:t>
+            </a:r>
+          </a:p>
+          <a:p>
+            <a:pPr algn="l">
+              <a:spcAft>
+                <a:spcPts val="400"/>
+              </a:spcAft>
+            </a:pPr>
+            <a:r>
+              <a:rPr sz="2400" b="1">
+                <a:solidFill>
+                  <a:srgbClr val="991B1B"/>
+                </a:solidFill>
+                <a:latin typeface="Calibri"/>
+              </a:rPr>
+              <a:t>c, d không là mệnh đề</a:t>
+            </a:r>
+          </a:p>
+        </p:txBody>
+      </p:sp>
+      <p:sp>
+        <p:nvSpPr>
+          <p:cNvPr id="9" name="Rounded Rectangle 8"/>
+          <p:cNvSpPr/>
+          <p:nvPr/>
+        </p:nvSpPr>
+        <p:spPr>
+          <a:xfrm>
+            <a:off x="10463479" y="457200"/>
+            <a:ext cx="1179576" cy="457200"/>
+          </a:xfrm>
+          <a:prstGeom prst="roundRect">
+            <a:avLst/>
+          </a:prstGeom>
+          <a:solidFill>
+            <a:srgbClr val="166534"/>
+          </a:solidFill>
+          <a:ln>
+            <a:noFill/>
+          </a:ln>
+          <a:effectLst/>
+        </p:spPr>
+        <p:style>
+          <a:lnRef idx="1">
+            <a:schemeClr val="accent1"/>
+          </a:lnRef>
+          <a:fillRef idx="3">
+            <a:schemeClr val="accent1"/>
+          </a:fillRef>
+          <a:effectRef idx="2">
+            <a:schemeClr val="accent1"/>
+          </a:effectRef>
+          <a:fontRef idx="minor">
+            <a:schemeClr val="lt1"/>
+          </a:fontRef>
+        </p:style>
+        <p:txBody>
+          <a:bodyPr rtlCol="0" anchor="ctr" tIns="0" bIns="0"/>
+          <a:lstStyle/>
+          <a:p>
+            <a:pPr algn="ctr"/>
+            <a:r>
+              <a:rPr sz="1400" b="1">
+                <a:solidFill>
+                  <a:srgbClr val="FFFFFF"/>
+                </a:solidFill>
+                <a:latin typeface="Arial"/>
+              </a:rPr>
+              <a:t>LỜI GIẢI</a:t>
             </a:r>
           </a:p>
         </p:txBody>
@@ -11304,6 +11800,378 @@
 </file>
 
 <file path=ppt/slides/slide7.xml><?xml version="1.0" encoding="utf-8"?>
+<p:sld xmlns:a="http://schemas.openxmlformats.org/drawingml/2006/main" xmlns:p="http://schemas.openxmlformats.org/presentationml/2006/main" xmlns:r="http://schemas.openxmlformats.org/officeDocument/2006/relationships">
+  <p:cSld>
+    <p:bg>
+      <p:bgPr>
+        <a:solidFill>
+          <a:srgbClr val="FFFFFF"/>
+        </a:solidFill>
+        <a:effectLst/>
+      </p:bgPr>
+    </p:bg>
+    <p:spTree>
+      <p:nvGrpSpPr>
+        <p:cNvPr id="1" name=""/>
+        <p:cNvGrpSpPr/>
+        <p:nvPr/>
+      </p:nvGrpSpPr>
+      <p:grpSpPr/>
+      <p:sp>
+        <p:nvSpPr>
+          <p:cNvPr id="2" name="Rectangle 1"/>
+          <p:cNvSpPr/>
+          <p:nvPr/>
+        </p:nvSpPr>
+        <p:spPr>
+          <a:xfrm>
+            <a:off x="457200" y="384048"/>
+            <a:ext cx="109728" cy="658368"/>
+          </a:xfrm>
+          <a:prstGeom prst="rect">
+            <a:avLst/>
+          </a:prstGeom>
+          <a:solidFill>
+            <a:srgbClr val="1E40AF"/>
+          </a:solidFill>
+          <a:ln>
+            <a:noFill/>
+          </a:ln>
+          <a:effectLst/>
+        </p:spPr>
+        <p:style>
+          <a:lnRef idx="1">
+            <a:schemeClr val="accent1"/>
+          </a:lnRef>
+          <a:fillRef idx="3">
+            <a:schemeClr val="accent1"/>
+          </a:fillRef>
+          <a:effectRef idx="2">
+            <a:schemeClr val="accent1"/>
+          </a:effectRef>
+          <a:fontRef idx="minor">
+            <a:schemeClr val="lt1"/>
+          </a:fontRef>
+        </p:style>
+        <p:txBody>
+          <a:bodyPr rtlCol="0" anchor="ctr"/>
+          <a:lstStyle/>
+          <a:p>
+            <a:pPr algn="ctr"/>
+          </a:p>
+        </p:txBody>
+      </p:sp>
+      <p:sp>
+        <p:nvSpPr>
+          <p:cNvPr id="3" name="TextBox 2"/>
+          <p:cNvSpPr txBox="1"/>
+          <p:nvPr/>
+        </p:nvSpPr>
+        <p:spPr>
+          <a:xfrm>
+            <a:off x="731520" y="274320"/>
+            <a:ext cx="10972800" cy="868680"/>
+          </a:xfrm>
+          <a:prstGeom prst="rect">
+            <a:avLst/>
+          </a:prstGeom>
+          <a:noFill/>
+        </p:spPr>
+        <p:txBody>
+          <a:bodyPr wrap="none" anchor="ctr">
+            <a:spAutoFit/>
+          </a:bodyPr>
+          <a:lstStyle/>
+          <a:p>
+            <a:r>
+              <a:rPr sz="3600" b="1">
+                <a:solidFill>
+                  <a:srgbClr val="1E40AF"/>
+                </a:solidFill>
+                <a:latin typeface="Arial"/>
+              </a:rPr>
+              <a:t>MỆNH ĐỀ CHỨA BIẾN</a:t>
+            </a:r>
+          </a:p>
+        </p:txBody>
+      </p:sp>
+      <p:sp>
+        <p:nvSpPr>
+          <p:cNvPr id="4" name="Rectangle 3"/>
+          <p:cNvSpPr/>
+          <p:nvPr/>
+        </p:nvSpPr>
+        <p:spPr>
+          <a:xfrm>
+            <a:off x="457200" y="1207008"/>
+            <a:ext cx="11274552" cy="22000"/>
+          </a:xfrm>
+          <a:prstGeom prst="rect">
+            <a:avLst/>
+          </a:prstGeom>
+          <a:solidFill>
+            <a:srgbClr val="E2E8F0"/>
+          </a:solidFill>
+          <a:ln>
+            <a:noFill/>
+          </a:ln>
+          <a:effectLst/>
+        </p:spPr>
+        <p:style>
+          <a:lnRef idx="1">
+            <a:schemeClr val="accent1"/>
+          </a:lnRef>
+          <a:fillRef idx="3">
+            <a:schemeClr val="accent1"/>
+          </a:fillRef>
+          <a:effectRef idx="2">
+            <a:schemeClr val="accent1"/>
+          </a:effectRef>
+          <a:fontRef idx="minor">
+            <a:schemeClr val="lt1"/>
+          </a:fontRef>
+        </p:style>
+        <p:txBody>
+          <a:bodyPr rtlCol="0" anchor="ctr"/>
+          <a:lstStyle/>
+          <a:p>
+            <a:pPr algn="ctr"/>
+          </a:p>
+        </p:txBody>
+      </p:sp>
+      <p:sp>
+        <p:nvSpPr>
+          <p:cNvPr id="5" name="TextBox 4"/>
+          <p:cNvSpPr txBox="1"/>
+          <p:nvPr/>
+        </p:nvSpPr>
+        <p:spPr>
+          <a:xfrm>
+            <a:off x="457200" y="6355080"/>
+            <a:ext cx="11274552" cy="365760"/>
+          </a:xfrm>
+          <a:prstGeom prst="rect">
+            <a:avLst/>
+          </a:prstGeom>
+          <a:noFill/>
+        </p:spPr>
+        <p:txBody>
+          <a:bodyPr wrap="none">
+            <a:spAutoFit/>
+          </a:bodyPr>
+          <a:lstStyle/>
+          <a:p>
+            <a:pPr algn="r"/>
+            <a:r>
+              <a:rPr sz="1200">
+                <a:solidFill>
+                  <a:srgbClr val="64748B"/>
+                </a:solidFill>
+                <a:latin typeface="Calibri"/>
+              </a:rPr>
+              <a:t>Toán 10 · Bài 1. Mệnh đề          7</a:t>
+            </a:r>
+          </a:p>
+        </p:txBody>
+      </p:sp>
+      <p:sp>
+        <p:nvSpPr>
+          <p:cNvPr id="6" name="TextBox 5"/>
+          <p:cNvSpPr txBox="1"/>
+          <p:nvPr/>
+        </p:nvSpPr>
+        <p:spPr>
+          <a:xfrm>
+            <a:off x="731520" y="1508760"/>
+            <a:ext cx="10789920" cy="2267712"/>
+          </a:xfrm>
+          <a:prstGeom prst="rect">
+            <a:avLst/>
+          </a:prstGeom>
+          <a:noFill/>
+        </p:spPr>
+        <p:txBody>
+          <a:bodyPr wrap="square" anchor="t">
+            <a:spAutoFit/>
+          </a:bodyPr>
+          <a:lstStyle/>
+          <a:p>
+            <a:pPr algn="l">
+              <a:spcAft>
+                <a:spcPts val="1000"/>
+              </a:spcAft>
+            </a:pPr>
+            <a:r>
+              <a:rPr sz="2400" b="1">
+                <a:solidFill>
+                  <a:srgbClr val="1E40AF"/>
+                </a:solidFill>
+                <a:latin typeface="Calibri"/>
+              </a:rPr>
+              <a:t>“n chia hết cho 2” (n ∈ ℕ)</a:t>
+            </a:r>
+          </a:p>
+          <a:p>
+            <a:pPr algn="l" marL="365760" indent="-365760">
+              <a:spcAft>
+                <a:spcPts val="1000"/>
+              </a:spcAft>
+              <a:buClr>
+                <a:srgbClr val="1E40AF"/>
+              </a:buClr>
+              <a:buFont typeface="Arial"/>
+              <a:buChar char="•"/>
+            </a:pPr>
+            <a:r>
+              <a:rPr sz="2400">
+                <a:solidFill>
+                  <a:srgbClr val="1E293B"/>
+                </a:solidFill>
+                <a:latin typeface="Calibri"/>
+              </a:rPr>
+              <a:t>Chưa xét được đúng hay sai</a:t>
+            </a:r>
+          </a:p>
+          <a:p>
+            <a:pPr algn="l" marL="365760" indent="-365760">
+              <a:spcAft>
+                <a:spcPts val="1000"/>
+              </a:spcAft>
+              <a:buClr>
+                <a:srgbClr val="1E40AF"/>
+              </a:buClr>
+              <a:buFont typeface="Arial"/>
+              <a:buChar char="•"/>
+            </a:pPr>
+            <a:r>
+              <a:rPr sz="2400">
+                <a:solidFill>
+                  <a:srgbClr val="1E293B"/>
+                </a:solidFill>
+                <a:latin typeface="Calibri"/>
+              </a:rPr>
+              <a:t>n = 5: mệnh đề sai</a:t>
+            </a:r>
+          </a:p>
+          <a:p>
+            <a:pPr algn="l" marL="365760" indent="-365760">
+              <a:spcAft>
+                <a:spcPts val="1000"/>
+              </a:spcAft>
+              <a:buClr>
+                <a:srgbClr val="1E40AF"/>
+              </a:buClr>
+              <a:buFont typeface="Arial"/>
+              <a:buChar char="•"/>
+            </a:pPr>
+            <a:r>
+              <a:rPr sz="2400">
+                <a:solidFill>
+                  <a:srgbClr val="1E293B"/>
+                </a:solidFill>
+                <a:latin typeface="Calibri"/>
+              </a:rPr>
+              <a:t>n = 10: mệnh đề đúng</a:t>
+            </a:r>
+          </a:p>
+        </p:txBody>
+      </p:sp>
+      <p:sp>
+        <p:nvSpPr>
+          <p:cNvPr id="7" name="Rounded Rectangle 6"/>
+          <p:cNvSpPr/>
+          <p:nvPr/>
+        </p:nvSpPr>
+        <p:spPr>
+          <a:xfrm>
+            <a:off x="731520" y="3913632"/>
+            <a:ext cx="8686800" cy="685800"/>
+          </a:xfrm>
+          <a:prstGeom prst="roundRect">
+            <a:avLst>
+              <a:gd name="adj" fmla="val 8000"/>
+            </a:avLst>
+          </a:prstGeom>
+          <a:solidFill>
+            <a:srgbClr val="FEF2F2"/>
+          </a:solidFill>
+          <a:ln w="19050">
+            <a:solidFill>
+              <a:srgbClr val="991B1B"/>
+            </a:solidFill>
+          </a:ln>
+          <a:effectLst/>
+        </p:spPr>
+        <p:style>
+          <a:lnRef idx="1">
+            <a:schemeClr val="accent1"/>
+          </a:lnRef>
+          <a:fillRef idx="3">
+            <a:schemeClr val="accent1"/>
+          </a:fillRef>
+          <a:effectRef idx="2">
+            <a:schemeClr val="accent1"/>
+          </a:effectRef>
+          <a:fontRef idx="minor">
+            <a:schemeClr val="lt1"/>
+          </a:fontRef>
+        </p:style>
+        <p:txBody>
+          <a:bodyPr rtlCol="0" anchor="ctr"/>
+          <a:lstStyle/>
+          <a:p>
+            <a:pPr algn="ctr"/>
+          </a:p>
+        </p:txBody>
+      </p:sp>
+      <p:sp>
+        <p:nvSpPr>
+          <p:cNvPr id="8" name="TextBox 7"/>
+          <p:cNvSpPr txBox="1"/>
+          <p:nvPr/>
+        </p:nvSpPr>
+        <p:spPr>
+          <a:xfrm>
+            <a:off x="914400" y="3913632"/>
+            <a:ext cx="8321040" cy="685800"/>
+          </a:xfrm>
+          <a:prstGeom prst="rect">
+            <a:avLst/>
+          </a:prstGeom>
+          <a:noFill/>
+        </p:spPr>
+        <p:txBody>
+          <a:bodyPr wrap="square" anchor="ctr">
+            <a:spAutoFit/>
+          </a:bodyPr>
+          <a:lstStyle/>
+          <a:p>
+            <a:pPr algn="l">
+              <a:spcAft>
+                <a:spcPts val="400"/>
+              </a:spcAft>
+            </a:pPr>
+            <a:r>
+              <a:rPr sz="2400" b="1">
+                <a:solidFill>
+                  <a:srgbClr val="991B1B"/>
+                </a:solidFill>
+                <a:latin typeface="Calibri"/>
+              </a:rPr>
+              <a:t>Gọi là mệnh đề chứa biến</a:t>
+            </a:r>
+          </a:p>
+        </p:txBody>
+      </p:sp>
+    </p:spTree>
+  </p:cSld>
+  <p:clrMapOvr>
+    <a:masterClrMapping/>
+  </p:clrMapOvr>
+</p:sld>
+</file>
+
+<file path=ppt/slides/slide8.xml><?xml version="1.0" encoding="utf-8"?>
 <p:sld xmlns:a="http://schemas.openxmlformats.org/drawingml/2006/main" xmlns:p="http://schemas.openxmlformats.org/presentationml/2006/main" xmlns:r="http://schemas.openxmlformats.org/officeDocument/2006/relationships">
   <p:cSld>
     <p:bg>
@@ -11918,291 +12786,6 @@
 </p:sld>
 </file>
 
-<file path=ppt/slides/slide8.xml><?xml version="1.0" encoding="utf-8"?>
-<p:sld xmlns:a="http://schemas.openxmlformats.org/drawingml/2006/main" xmlns:p="http://schemas.openxmlformats.org/presentationml/2006/main" xmlns:r="http://schemas.openxmlformats.org/officeDocument/2006/relationships">
-  <p:cSld>
-    <p:bg>
-      <p:bgPr>
-        <a:solidFill>
-          <a:srgbClr val="FFFFFF"/>
-        </a:solidFill>
-        <a:effectLst/>
-      </p:bgPr>
-    </p:bg>
-    <p:spTree>
-      <p:nvGrpSpPr>
-        <p:cNvPr id="1" name=""/>
-        <p:cNvGrpSpPr/>
-        <p:nvPr/>
-      </p:nvGrpSpPr>
-      <p:grpSpPr/>
-      <p:sp>
-        <p:nvSpPr>
-          <p:cNvPr id="2" name="Rectangle 1"/>
-          <p:cNvSpPr/>
-          <p:nvPr/>
-        </p:nvSpPr>
-        <p:spPr>
-          <a:xfrm>
-            <a:off x="457200" y="384048"/>
-            <a:ext cx="109728" cy="658368"/>
-          </a:xfrm>
-          <a:prstGeom prst="rect">
-            <a:avLst/>
-          </a:prstGeom>
-          <a:solidFill>
-            <a:srgbClr val="1E40AF"/>
-          </a:solidFill>
-          <a:ln>
-            <a:noFill/>
-          </a:ln>
-          <a:effectLst/>
-        </p:spPr>
-        <p:style>
-          <a:lnRef idx="1">
-            <a:schemeClr val="accent1"/>
-          </a:lnRef>
-          <a:fillRef idx="3">
-            <a:schemeClr val="accent1"/>
-          </a:fillRef>
-          <a:effectRef idx="2">
-            <a:schemeClr val="accent1"/>
-          </a:effectRef>
-          <a:fontRef idx="minor">
-            <a:schemeClr val="lt1"/>
-          </a:fontRef>
-        </p:style>
-        <p:txBody>
-          <a:bodyPr rtlCol="0" anchor="ctr"/>
-          <a:lstStyle/>
-          <a:p>
-            <a:pPr algn="ctr"/>
-          </a:p>
-        </p:txBody>
-      </p:sp>
-      <p:sp>
-        <p:nvSpPr>
-          <p:cNvPr id="3" name="TextBox 2"/>
-          <p:cNvSpPr txBox="1"/>
-          <p:nvPr/>
-        </p:nvSpPr>
-        <p:spPr>
-          <a:xfrm>
-            <a:off x="731520" y="274320"/>
-            <a:ext cx="10972800" cy="868680"/>
-          </a:xfrm>
-          <a:prstGeom prst="rect">
-            <a:avLst/>
-          </a:prstGeom>
-          <a:noFill/>
-        </p:spPr>
-        <p:txBody>
-          <a:bodyPr wrap="none" anchor="ctr">
-            <a:spAutoFit/>
-          </a:bodyPr>
-          <a:lstStyle/>
-          <a:p>
-            <a:r>
-              <a:rPr sz="3600" b="1">
-                <a:solidFill>
-                  <a:srgbClr val="1E40AF"/>
-                </a:solidFill>
-                <a:latin typeface="Arial"/>
-              </a:rPr>
-              <a:t>LUYỆN TẬP: MỆNH ĐỀ PHỦ ĐỊNH</a:t>
-            </a:r>
-          </a:p>
-        </p:txBody>
-      </p:sp>
-      <p:sp>
-        <p:nvSpPr>
-          <p:cNvPr id="4" name="Rectangle 3"/>
-          <p:cNvSpPr/>
-          <p:nvPr/>
-        </p:nvSpPr>
-        <p:spPr>
-          <a:xfrm>
-            <a:off x="457200" y="1207008"/>
-            <a:ext cx="11274552" cy="22000"/>
-          </a:xfrm>
-          <a:prstGeom prst="rect">
-            <a:avLst/>
-          </a:prstGeom>
-          <a:solidFill>
-            <a:srgbClr val="E2E8F0"/>
-          </a:solidFill>
-          <a:ln>
-            <a:noFill/>
-          </a:ln>
-          <a:effectLst/>
-        </p:spPr>
-        <p:style>
-          <a:lnRef idx="1">
-            <a:schemeClr val="accent1"/>
-          </a:lnRef>
-          <a:fillRef idx="3">
-            <a:schemeClr val="accent1"/>
-          </a:fillRef>
-          <a:effectRef idx="2">
-            <a:schemeClr val="accent1"/>
-          </a:effectRef>
-          <a:fontRef idx="minor">
-            <a:schemeClr val="lt1"/>
-          </a:fontRef>
-        </p:style>
-        <p:txBody>
-          <a:bodyPr rtlCol="0" anchor="ctr"/>
-          <a:lstStyle/>
-          <a:p>
-            <a:pPr algn="ctr"/>
-          </a:p>
-        </p:txBody>
-      </p:sp>
-      <p:sp>
-        <p:nvSpPr>
-          <p:cNvPr id="5" name="TextBox 4"/>
-          <p:cNvSpPr txBox="1"/>
-          <p:nvPr/>
-        </p:nvSpPr>
-        <p:spPr>
-          <a:xfrm>
-            <a:off x="457200" y="6355080"/>
-            <a:ext cx="11274552" cy="365760"/>
-          </a:xfrm>
-          <a:prstGeom prst="rect">
-            <a:avLst/>
-          </a:prstGeom>
-          <a:noFill/>
-        </p:spPr>
-        <p:txBody>
-          <a:bodyPr wrap="none">
-            <a:spAutoFit/>
-          </a:bodyPr>
-          <a:lstStyle/>
-          <a:p>
-            <a:pPr algn="r"/>
-            <a:r>
-              <a:rPr sz="1200">
-                <a:solidFill>
-                  <a:srgbClr val="64748B"/>
-                </a:solidFill>
-                <a:latin typeface="Calibri"/>
-              </a:rPr>
-              <a:t>Toán 10 · Bài 1. Mệnh đề          9</a:t>
-            </a:r>
-          </a:p>
-        </p:txBody>
-      </p:sp>
-      <p:sp>
-        <p:nvSpPr>
-          <p:cNvPr id="6" name="TextBox 5"/>
-          <p:cNvSpPr txBox="1"/>
-          <p:nvPr/>
-        </p:nvSpPr>
-        <p:spPr>
-          <a:xfrm>
-            <a:off x="731520" y="1508760"/>
-            <a:ext cx="10789920" cy="2267712"/>
-          </a:xfrm>
-          <a:prstGeom prst="rect">
-            <a:avLst/>
-          </a:prstGeom>
-          <a:noFill/>
-        </p:spPr>
-        <p:txBody>
-          <a:bodyPr wrap="square" anchor="t">
-            <a:spAutoFit/>
-          </a:bodyPr>
-          <a:lstStyle/>
-          <a:p>
-            <a:pPr algn="l" marL="365760" indent="-365760">
-              <a:spcAft>
-                <a:spcPts val="1000"/>
-              </a:spcAft>
-              <a:buClr>
-                <a:srgbClr val="1E40AF"/>
-              </a:buClr>
-              <a:buFont typeface="Arial"/>
-              <a:buChar char="•"/>
-            </a:pPr>
-            <a:r>
-              <a:rPr sz="2400">
-                <a:solidFill>
-                  <a:srgbClr val="1E293B"/>
-                </a:solidFill>
-                <a:latin typeface="Calibri"/>
-              </a:rPr>
-              <a:t>Lập mệnh đề phủ định, xét đúng sai:</a:t>
-            </a:r>
-          </a:p>
-          <a:p>
-            <a:pPr algn="l" marL="365760" indent="-365760">
-              <a:spcAft>
-                <a:spcPts val="1000"/>
-              </a:spcAft>
-              <a:buClr>
-                <a:srgbClr val="1E40AF"/>
-              </a:buClr>
-              <a:buFont typeface="Arial"/>
-              <a:buChar char="•"/>
-            </a:pPr>
-            <a:r>
-              <a:rPr sz="2400">
-                <a:solidFill>
-                  <a:srgbClr val="1E293B"/>
-                </a:solidFill>
-                <a:latin typeface="Calibri"/>
-              </a:rPr>
-              <a:t>P: “2022 chia hết cho 5”</a:t>
-            </a:r>
-          </a:p>
-          <a:p>
-            <a:pPr algn="l" marL="365760" indent="-365760">
-              <a:spcAft>
-                <a:spcPts val="1000"/>
-              </a:spcAft>
-              <a:buClr>
-                <a:srgbClr val="1E40AF"/>
-              </a:buClr>
-              <a:buFont typeface="Arial"/>
-              <a:buChar char="•"/>
-            </a:pPr>
-            <a:r>
-              <a:rPr sz="2400">
-                <a:solidFill>
-                  <a:srgbClr val="1E293B"/>
-                </a:solidFill>
-                <a:latin typeface="Calibri"/>
-              </a:rPr>
-              <a:t>Q: “2x + 1 &gt; 0 có nghiệm”</a:t>
-            </a:r>
-          </a:p>
-          <a:p>
-            <a:pPr algn="l">
-              <a:spcAft>
-                <a:spcPts val="1000"/>
-              </a:spcAft>
-            </a:pPr>
-            <a:r>
-              <a:rPr sz="2400" b="1">
-                <a:solidFill>
-                  <a:srgbClr val="1E40AF"/>
-                </a:solidFill>
-                <a:latin typeface="Calibri"/>
-              </a:rPr>
-              <a:t>Gợi mở: Thêm hoặc bớt từ “không”</a:t>
-            </a:r>
-          </a:p>
-        </p:txBody>
-      </p:sp>
-    </p:spTree>
-  </p:cSld>
-  <p:clrMapOvr>
-    <a:masterClrMapping/>
-  </p:clrMapOvr>
-</p:sld>
-</file>
-
 <file path=ppt/slides/slide9.xml><?xml version="1.0" encoding="utf-8"?>
 <p:sld xmlns:a="http://schemas.openxmlformats.org/drawingml/2006/main" xmlns:p="http://schemas.openxmlformats.org/presentationml/2006/main" xmlns:r="http://schemas.openxmlformats.org/officeDocument/2006/relationships">
   <p:cSld>
@@ -12274,7 +12857,7 @@
         <p:spPr>
           <a:xfrm>
             <a:off x="731520" y="274320"/>
-            <a:ext cx="10972800" cy="868680"/>
+            <a:ext cx="9848088" cy="868680"/>
           </a:xfrm>
           <a:prstGeom prst="rect">
             <a:avLst/>
@@ -12294,7 +12877,7 @@
                 </a:solidFill>
                 <a:latin typeface="Arial"/>
               </a:rPr>
-              <a:t>3. MỆNH ĐỀ KÉO THEO</a:t>
+              <a:t>LUYỆN TẬP: MỆNH ĐỀ PHỦ ĐỊNH</a:t>
             </a:r>
           </a:p>
         </p:txBody>
@@ -12373,7 +12956,7 @@
                 </a:solidFill>
                 <a:latin typeface="Calibri"/>
               </a:rPr>
-              <a:t>Toán 10 · Bài 1. Mệnh đề          11</a:t>
+              <a:t>Toán 10 · Bài 1. Mệnh đề          9</a:t>
             </a:r>
           </a:p>
         </p:txBody>
@@ -12387,7 +12970,7 @@
         <p:spPr>
           <a:xfrm>
             <a:off x="731520" y="1508760"/>
-            <a:ext cx="6400800" cy="1700784"/>
+            <a:ext cx="10789920" cy="2267712"/>
           </a:xfrm>
           <a:prstGeom prst="rect">
             <a:avLst/>
@@ -12399,22 +12982,6 @@
             <a:spAutoFit/>
           </a:bodyPr>
           <a:lstStyle/>
-          <a:p>
-            <a:pPr algn="l">
-              <a:spcAft>
-                <a:spcPts val="1000"/>
-              </a:spcAft>
-            </a:pPr>
-            <a:r>
-              <a:rPr sz="2400" b="1">
-                <a:solidFill>
-                  <a:srgbClr val="1E40AF"/>
-                </a:solidFill>
-                <a:latin typeface="Calibri"/>
-              </a:rPr>
-              <a:t>“Nếu P thì Q”: P ⇒ Q</a:t>
-            </a:r>
-          </a:p>
           <a:p>
             <a:pPr algn="l" marL="365760" indent="-365760">
               <a:spcAft>
@@ -12433,7 +13000,7 @@
                 </a:solidFill>
                 <a:latin typeface="Calibri"/>
               </a:rPr>
-              <a:t>P: tam giác ABC vuông tại A</a:t>
+              <a:t>Lập mệnh đề phủ định, xét đúng sai:</a:t>
             </a:r>
           </a:p>
           <a:p>
@@ -12454,7 +13021,44 @@
                 </a:solidFill>
                 <a:latin typeface="Calibri"/>
               </a:rPr>
-              <a:t>Q: AB² + AC² = BC²</a:t>
+              <a:t>P: “2022 chia hết cho 5”</a:t>
+            </a:r>
+          </a:p>
+          <a:p>
+            <a:pPr algn="l" marL="365760" indent="-365760">
+              <a:spcAft>
+                <a:spcPts val="1000"/>
+              </a:spcAft>
+              <a:buClr>
+                <a:srgbClr val="1E40AF"/>
+              </a:buClr>
+              <a:buFont typeface="Arial"/>
+              <a:buChar char="•"/>
+            </a:pPr>
+            <a:r>
+              <a:rPr sz="2400">
+                <a:solidFill>
+                  <a:srgbClr val="1E293B"/>
+                </a:solidFill>
+                <a:latin typeface="Calibri"/>
+              </a:rPr>
+              <a:t>Q: “2x + 1 &gt; 0 có nghiệm”</a:t>
+            </a:r>
+          </a:p>
+          <a:p>
+            <a:pPr algn="l">
+              <a:spcAft>
+                <a:spcPts val="1000"/>
+              </a:spcAft>
+            </a:pPr>
+            <a:r>
+              <a:rPr sz="2400" b="1">
+                <a:solidFill>
+                  <a:srgbClr val="1E40AF"/>
+                </a:solidFill>
+                <a:latin typeface="Calibri"/>
+              </a:rPr>
+              <a:t>Gợi mở: Thêm hoặc bớt từ “không”</a:t>
             </a:r>
           </a:p>
         </p:txBody>
@@ -12467,21 +13071,17 @@
         </p:nvSpPr>
         <p:spPr>
           <a:xfrm>
-            <a:off x="731520" y="3346704"/>
-            <a:ext cx="6400800" cy="1143000"/>
+            <a:off x="10701223" y="457200"/>
+            <a:ext cx="941832" cy="457200"/>
           </a:xfrm>
           <a:prstGeom prst="roundRect">
-            <a:avLst>
-              <a:gd name="adj" fmla="val 8000"/>
-            </a:avLst>
+            <a:avLst/>
           </a:prstGeom>
           <a:solidFill>
-            <a:srgbClr val="FEF2F2"/>
+            <a:srgbClr val="1E40AF"/>
           </a:solidFill>
-          <a:ln w="19050">
-            <a:solidFill>
-              <a:srgbClr val="991B1B"/>
-            </a:solidFill>
+          <a:ln>
+            <a:noFill/>
           </a:ln>
           <a:effectLst/>
         </p:spPr>
@@ -12500,92 +13100,22 @@
           </a:fontRef>
         </p:style>
         <p:txBody>
-          <a:bodyPr rtlCol="0" anchor="ctr"/>
+          <a:bodyPr rtlCol="0" anchor="ctr" tIns="0" bIns="0"/>
           <a:lstStyle/>
           <a:p>
             <a:pPr algn="ctr"/>
-          </a:p>
-        </p:txBody>
-      </p:sp>
-      <p:sp>
-        <p:nvSpPr>
-          <p:cNvPr id="8" name="TextBox 7"/>
-          <p:cNvSpPr txBox="1"/>
-          <p:nvPr/>
-        </p:nvSpPr>
-        <p:spPr>
-          <a:xfrm>
-            <a:off x="914400" y="3346704"/>
-            <a:ext cx="6035040" cy="1143000"/>
-          </a:xfrm>
-          <a:prstGeom prst="rect">
-            <a:avLst/>
-          </a:prstGeom>
-          <a:noFill/>
-        </p:spPr>
-        <p:txBody>
-          <a:bodyPr wrap="square" anchor="ctr">
-            <a:spAutoFit/>
-          </a:bodyPr>
-          <a:lstStyle/>
-          <a:p>
-            <a:pPr algn="l">
-              <a:spcAft>
-                <a:spcPts val="400"/>
-              </a:spcAft>
-            </a:pPr>
-            <a:r>
-              <a:rPr sz="2400" b="1">
-                <a:solidFill>
-                  <a:srgbClr val="991B1B"/>
-                </a:solidFill>
-                <a:latin typeface="Calibri"/>
-              </a:rPr>
-              <a:t>P ⇒ Q chỉ sai khi:</a:t>
-            </a:r>
-          </a:p>
-          <a:p>
-            <a:pPr algn="l">
-              <a:spcAft>
-                <a:spcPts val="400"/>
-              </a:spcAft>
-            </a:pPr>
-            <a:r>
-              <a:rPr sz="2400" b="1">
-                <a:solidFill>
-                  <a:srgbClr val="991B1B"/>
-                </a:solidFill>
-                <a:latin typeface="Calibri"/>
-              </a:rPr>
-              <a:t>P đúng và Q sai</a:t>
-            </a:r>
-          </a:p>
-        </p:txBody>
-      </p:sp>
-      <p:pic>
-        <p:nvPicPr>
-          <p:cNvPr id="9" name="Picture 8" descr="rId12.png"/>
-          <p:cNvPicPr>
-            <a:picLocks noChangeAspect="1"/>
-          </p:cNvPicPr>
-          <p:nvPr/>
-        </p:nvPicPr>
-        <p:blipFill>
-          <a:blip r:embed="rId2"/>
-          <a:stretch>
-            <a:fillRect/>
-          </a:stretch>
-        </p:blipFill>
-        <p:spPr>
-          <a:xfrm>
-            <a:off x="7406640" y="2199916"/>
-            <a:ext cx="4389120" cy="3235408"/>
-          </a:xfrm>
-          <a:prstGeom prst="rect">
-            <a:avLst/>
-          </a:prstGeom>
-        </p:spPr>
-      </p:pic>
+            <a:r>
+              <a:rPr sz="1400" b="1">
+                <a:solidFill>
+                  <a:srgbClr val="FFFFFF"/>
+                </a:solidFill>
+                <a:latin typeface="Arial"/>
+              </a:rPr>
+              <a:t>ĐỀ BÀI</a:t>
+            </a:r>
+          </a:p>
+        </p:txBody>
+      </p:sp>
     </p:spTree>
   </p:cSld>
   <p:clrMapOvr>
